--- a/docs/examples/sample-deck.pptx
+++ b/docs/examples/sample-deck.pptx
@@ -244,7 +244,7 @@
               <c:strCache>
                 <c:ptCount val="1"/>
                 <c:pt idx="0">
-                  <c:v>Churn by segment</c:v>
+                  <c:v>Weighted monthly churn by segment</c:v>
                 </c:pt>
               </c:strCache>
             </c:strRef>
@@ -801,17 +801,77 @@
           <a:lstStyle/>
           <a:p>
             <a:r>
-              <a:t>f1 · Churn rate · churn_rate_quarter · main.cs.churn_monthly · statement duckdb-5388cc790add · as of 2026-10-16 17:45 UTC</a:t>
-            </a:r>
-          </a:p>
-          <a:p>
-            <a:r>
-              <a:t>f2 · Net revenue retention · nrr_quarter · main.cs.revenue_monthly · statement duckdb-4e74ade4ee1f · as of 2026-10-16 17:45 UTC</a:t>
-            </a:r>
-          </a:p>
-          <a:p>
-            <a:r>
-              <a:t>f3 · Active subscriptions · active_subscriptions · main.cs.churn_monthly · statement duckdb-7bb33ad98091 · as of 2026-10-16 17:45 UTC</a:t>
+              <a:t>f1 · Monthly churn (weighted) · churn_rate_quarter · main.cs.churn_monthly · statement duckdb-eed72c8e07d1 · queried 2026-10-18 04:18 UTC</a:t>
+            </a:r>
+          </a:p>
+          <a:p>
+            <a:r>
+              <a:t>f2 · Monthly NRR (weighted) · nrr_quarter · main.cs.revenue_monthly · statement duckdb-5075d99a6ed2 · queried 2026-10-18 04:18 UTC</a:t>
+            </a:r>
+          </a:p>
+          <a:p>
+            <a:r>
+              <a:t>f3 · Active subscriptions · active_subscriptions · main.cs.churn_monthly · statement duckdb-f73e339fbd2f · queried 2026-10-18 04:18 UTC</a:t>
+            </a:r>
+          </a:p>
+          <a:p>
+            <a:r>
+              <a:t>f1 SQL:</a:t>
+            </a:r>
+          </a:p>
+          <a:p>
+            <a:r>
+              <a:t>SELECT CASE WHEN SUM(active_start) &lt;&gt; 0 THEN SUM(churned) / SUM(active_start) ELSE NULL END AS churn_rate FROM lake.cs.v_churn_monthly__bob WHERE "month" &gt;= $start_month AND "month" &lt; $end_month</a:t>
+            </a:r>
+          </a:p>
+          <a:p>
+            <a:r>
+              <a:t>f1 parameters: {"end_month": "2026-10-01", "start_month": "2026-07-01"}</a:t>
+            </a:r>
+          </a:p>
+          <a:p>
+            <a:r>
+              <a:t>f1 template SHA-256: a897f662afe1919b49268c820e58ea712c28e38f408d7d77465b1debd7053d63</a:t>
+            </a:r>
+          </a:p>
+          <a:p>
+            <a:r>
+              <a:t>f2 SQL:</a:t>
+            </a:r>
+          </a:p>
+          <a:p>
+            <a:r>
+              <a:t>SELECT CASE WHEN SUM(mrr_start) &lt;&gt; 0 THEN SUM(mrr_retained) / SUM(mrr_start) ELSE NULL END AS nrr FROM lake.cs.v_revenue_monthly__bob WHERE "month" &gt;= $start_month AND "month" &lt; $end_month</a:t>
+            </a:r>
+          </a:p>
+          <a:p>
+            <a:r>
+              <a:t>f2 parameters: {"end_month": "2026-10-01", "start_month": "2026-07-01"}</a:t>
+            </a:r>
+          </a:p>
+          <a:p>
+            <a:r>
+              <a:t>f2 template SHA-256: ec85130488823e6392d012cfb710d63468646785670750d0ae22183c9730561a</a:t>
+            </a:r>
+          </a:p>
+          <a:p>
+            <a:r>
+              <a:t>f3 SQL:</a:t>
+            </a:r>
+          </a:p>
+          <a:p>
+            <a:r>
+              <a:t>SELECT SUM(active_start) AS active_subscriptions FROM lake.cs.v_churn_monthly__bob WHERE "month" = $start_month</a:t>
+            </a:r>
+          </a:p>
+          <a:p>
+            <a:r>
+              <a:t>f3 parameters: {"start_month": "2026-07-01"}</a:t>
+            </a:r>
+          </a:p>
+          <a:p>
+            <a:r>
+              <a:t>f3 template SHA-256: 0e1eca481a61ce5a487969e9b73097141164bf4d00f5b0c10955808376a6caaf</a:t>
             </a:r>
           </a:p>
         </p:txBody>
@@ -881,7 +941,27 @@
           <a:lstStyle/>
           <a:p>
             <a:r>
-              <a:t>f4 · Monthly churn · churn_trend_monthly · main.cs.churn_monthly · statement duckdb-e7add026665b · as of 2026-10-16 17:45 UTC</a:t>
+              <a:t>f4 · Monthly churn · churn_trend_monthly · main.cs.churn_monthly · statement duckdb-652fcac2b08a · queried 2026-10-18 04:18 UTC</a:t>
+            </a:r>
+          </a:p>
+          <a:p>
+            <a:r>
+              <a:t>f4 SQL:</a:t>
+            </a:r>
+          </a:p>
+          <a:p>
+            <a:r>
+              <a:t>SELECT STRFTIME(CAST("month" AS TIMESTAMP), '%Y-%m') AS period, CASE WHEN SUM(active_start) &lt;&gt; 0 THEN SUM(churned) / SUM(active_start) ELSE NULL END AS churn_rate FROM lake.cs.v_churn_monthly__bob WHERE "month" &gt;= $start_month AND "month" &lt; $end_month GROUP BY STRFTIME(CAST("month" AS TIMESTAMP), '%Y-%m') ORDER BY period NULLS FIRST</a:t>
+            </a:r>
+          </a:p>
+          <a:p>
+            <a:r>
+              <a:t>f4 parameters: {"end_month": "2026-10-01", "start_month": "2026-07-01"}</a:t>
+            </a:r>
+          </a:p>
+          <a:p>
+            <a:r>
+              <a:t>f4 template SHA-256: a65c9afc5de386b7fa7a0a0e07559acc0c0782b68368b4788443dcc983561b89</a:t>
             </a:r>
           </a:p>
         </p:txBody>
@@ -951,7 +1031,27 @@
           <a:lstStyle/>
           <a:p>
             <a:r>
-              <a:t>f5 · Churn by segment · churn_by_segment · main.cs.churn_monthly · statement duckdb-f9d854e6ef09 · as of 2026-10-16 17:45 UTC</a:t>
+              <a:t>f5 · Weighted monthly churn by segment · churn_by_segment · main.cs.churn_monthly · statement duckdb-f610159e247c · queried 2026-10-18 04:18 UTC</a:t>
+            </a:r>
+          </a:p>
+          <a:p>
+            <a:r>
+              <a:t>f5 SQL:</a:t>
+            </a:r>
+          </a:p>
+          <a:p>
+            <a:r>
+              <a:t>SELECT segment, CASE WHEN SUM(active_start) &lt;&gt; 0 THEN SUM(churned) / SUM(active_start) ELSE NULL END AS churn_rate FROM lake.cs.v_churn_monthly__bob WHERE "month" &gt;= $start_month AND "month" &lt; $end_month GROUP BY segment ORDER BY segment NULLS FIRST</a:t>
+            </a:r>
+          </a:p>
+          <a:p>
+            <a:r>
+              <a:t>f5 parameters: {"end_month": "2026-10-01", "start_month": "2026-07-01"}</a:t>
+            </a:r>
+          </a:p>
+          <a:p>
+            <a:r>
+              <a:t>f5 template SHA-256: 99ee1f03a8e2648a6287d555c03e257b8edeacc38d7f3c16b260ad6e88079e9f</a:t>
             </a:r>
           </a:p>
         </p:txBody>
@@ -1021,27 +1121,127 @@
           <a:lstStyle/>
           <a:p>
             <a:r>
-              <a:t>f1 · Churn rate · churn_rate_quarter · main.cs.churn_monthly · statement duckdb-5388cc790add · as of 2026-10-16 17:45 UTC</a:t>
-            </a:r>
-          </a:p>
-          <a:p>
-            <a:r>
-              <a:t>f2 · Net revenue retention · nrr_quarter · main.cs.revenue_monthly · statement duckdb-4e74ade4ee1f · as of 2026-10-16 17:45 UTC</a:t>
-            </a:r>
-          </a:p>
-          <a:p>
-            <a:r>
-              <a:t>f3 · Active subscriptions · active_subscriptions · main.cs.churn_monthly · statement duckdb-7bb33ad98091 · as of 2026-10-16 17:45 UTC</a:t>
-            </a:r>
-          </a:p>
-          <a:p>
-            <a:r>
-              <a:t>f4 · Monthly churn · churn_trend_monthly · main.cs.churn_monthly · statement duckdb-e7add026665b · as of 2026-10-16 17:45 UTC</a:t>
-            </a:r>
-          </a:p>
-          <a:p>
-            <a:r>
-              <a:t>f5 · Churn by segment · churn_by_segment · main.cs.churn_monthly · statement duckdb-f9d854e6ef09 · as of 2026-10-16 17:45 UTC</a:t>
+              <a:t>f1 · Monthly churn (weighted) · churn_rate_quarter · main.cs.churn_monthly · statement duckdb-eed72c8e07d1 · queried 2026-10-18 04:18 UTC</a:t>
+            </a:r>
+          </a:p>
+          <a:p>
+            <a:r>
+              <a:t>f2 · Monthly NRR (weighted) · nrr_quarter · main.cs.revenue_monthly · statement duckdb-5075d99a6ed2 · queried 2026-10-18 04:18 UTC</a:t>
+            </a:r>
+          </a:p>
+          <a:p>
+            <a:r>
+              <a:t>f3 · Active subscriptions · active_subscriptions · main.cs.churn_monthly · statement duckdb-f73e339fbd2f · queried 2026-10-18 04:18 UTC</a:t>
+            </a:r>
+          </a:p>
+          <a:p>
+            <a:r>
+              <a:t>f4 · Monthly churn · churn_trend_monthly · main.cs.churn_monthly · statement duckdb-652fcac2b08a · queried 2026-10-18 04:18 UTC</a:t>
+            </a:r>
+          </a:p>
+          <a:p>
+            <a:r>
+              <a:t>f5 · Weighted monthly churn by segment · churn_by_segment · main.cs.churn_monthly · statement duckdb-f610159e247c · queried 2026-10-18 04:18 UTC</a:t>
+            </a:r>
+          </a:p>
+          <a:p>
+            <a:r>
+              <a:t>f1 SQL:</a:t>
+            </a:r>
+          </a:p>
+          <a:p>
+            <a:r>
+              <a:t>SELECT CASE WHEN SUM(active_start) &lt;&gt; 0 THEN SUM(churned) / SUM(active_start) ELSE NULL END AS churn_rate FROM lake.cs.v_churn_monthly__bob WHERE "month" &gt;= $start_month AND "month" &lt; $end_month</a:t>
+            </a:r>
+          </a:p>
+          <a:p>
+            <a:r>
+              <a:t>f1 parameters: {"end_month": "2026-10-01", "start_month": "2026-07-01"}</a:t>
+            </a:r>
+          </a:p>
+          <a:p>
+            <a:r>
+              <a:t>f1 template SHA-256: a897f662afe1919b49268c820e58ea712c28e38f408d7d77465b1debd7053d63</a:t>
+            </a:r>
+          </a:p>
+          <a:p>
+            <a:r>
+              <a:t>f2 SQL:</a:t>
+            </a:r>
+          </a:p>
+          <a:p>
+            <a:r>
+              <a:t>SELECT CASE WHEN SUM(mrr_start) &lt;&gt; 0 THEN SUM(mrr_retained) / SUM(mrr_start) ELSE NULL END AS nrr FROM lake.cs.v_revenue_monthly__bob WHERE "month" &gt;= $start_month AND "month" &lt; $end_month</a:t>
+            </a:r>
+          </a:p>
+          <a:p>
+            <a:r>
+              <a:t>f2 parameters: {"end_month": "2026-10-01", "start_month": "2026-07-01"}</a:t>
+            </a:r>
+          </a:p>
+          <a:p>
+            <a:r>
+              <a:t>f2 template SHA-256: ec85130488823e6392d012cfb710d63468646785670750d0ae22183c9730561a</a:t>
+            </a:r>
+          </a:p>
+          <a:p>
+            <a:r>
+              <a:t>f3 SQL:</a:t>
+            </a:r>
+          </a:p>
+          <a:p>
+            <a:r>
+              <a:t>SELECT SUM(active_start) AS active_subscriptions FROM lake.cs.v_churn_monthly__bob WHERE "month" = $start_month</a:t>
+            </a:r>
+          </a:p>
+          <a:p>
+            <a:r>
+              <a:t>f3 parameters: {"start_month": "2026-07-01"}</a:t>
+            </a:r>
+          </a:p>
+          <a:p>
+            <a:r>
+              <a:t>f3 template SHA-256: 0e1eca481a61ce5a487969e9b73097141164bf4d00f5b0c10955808376a6caaf</a:t>
+            </a:r>
+          </a:p>
+          <a:p>
+            <a:r>
+              <a:t>f4 SQL:</a:t>
+            </a:r>
+          </a:p>
+          <a:p>
+            <a:r>
+              <a:t>SELECT STRFTIME(CAST("month" AS TIMESTAMP), '%Y-%m') AS period, CASE WHEN SUM(active_start) &lt;&gt; 0 THEN SUM(churned) / SUM(active_start) ELSE NULL END AS churn_rate FROM lake.cs.v_churn_monthly__bob WHERE "month" &gt;= $start_month AND "month" &lt; $end_month GROUP BY STRFTIME(CAST("month" AS TIMESTAMP), '%Y-%m') ORDER BY period NULLS FIRST</a:t>
+            </a:r>
+          </a:p>
+          <a:p>
+            <a:r>
+              <a:t>f4 parameters: {"end_month": "2026-10-01", "start_month": "2026-07-01"}</a:t>
+            </a:r>
+          </a:p>
+          <a:p>
+            <a:r>
+              <a:t>f4 template SHA-256: a65c9afc5de386b7fa7a0a0e07559acc0c0782b68368b4788443dcc983561b89</a:t>
+            </a:r>
+          </a:p>
+          <a:p>
+            <a:r>
+              <a:t>f5 SQL:</a:t>
+            </a:r>
+          </a:p>
+          <a:p>
+            <a:r>
+              <a:t>SELECT segment, CASE WHEN SUM(active_start) &lt;&gt; 0 THEN SUM(churned) / SUM(active_start) ELSE NULL END AS churn_rate FROM lake.cs.v_churn_monthly__bob WHERE "month" &gt;= $start_month AND "month" &lt; $end_month GROUP BY segment ORDER BY segment NULLS FIRST</a:t>
+            </a:r>
+          </a:p>
+          <a:p>
+            <a:r>
+              <a:t>f5 parameters: {"end_month": "2026-10-01", "start_month": "2026-07-01"}</a:t>
+            </a:r>
+          </a:p>
+          <a:p>
+            <a:r>
+              <a:t>f5 template SHA-256: 99ee1f03a8e2648a6287d555c03e257b8edeacc38d7f3c16b260ad6e88079e9f</a:t>
             </a:r>
           </a:p>
         </p:txBody>
@@ -4158,7 +4358,7 @@
           <a:p>
             <a:r>
               <a:rPr sz="1600"/>
-              <a:t>Churn rate</a:t>
+              <a:t>Monthly churn (weighted)</a:t>
             </a:r>
           </a:p>
         </p:txBody>
@@ -4193,7 +4393,7 @@
           <a:p>
             <a:r>
               <a:rPr sz="1600"/>
-              <a:t>Net revenue retention</a:t>
+              <a:t>Monthly NRR (weighted)</a:t>
             </a:r>
           </a:p>
         </p:txBody>
@@ -4257,7 +4457,7 @@
           <a:p>
             <a:r>
               <a:rPr sz="2000"/>
-              <a:t>Churn reached 2.4% this quarter</a:t>
+              <a:t>Weighted monthly churn was 2.4% over the review period</a:t>
             </a:r>
           </a:p>
         </p:txBody>
@@ -4353,7 +4553,7 @@
           <a:lstStyle/>
           <a:p>
             <a:r>
-              <a:t>Churn by segment</a:t>
+              <a:t>Monthly churn by segment</a:t>
             </a:r>
           </a:p>
         </p:txBody>
@@ -4432,31 +4632,31 @@
           <a:p>
             <a:r>
               <a:rPr sz="1400"/>
-              <a:t>f1 · Churn rate · churn_rate_quarter · main.cs.churn_monthly · statement duckdb-5388cc790add · as of 2026-10-16 17:45 UTC</a:t>
+              <a:t>f1 · Monthly churn (weighted) · churn_rate_quarter · main.cs.churn_monthly · statement duckdb-eed72c8e07d1 · queried 2026-10-18 04:18 UTC</a:t>
             </a:r>
           </a:p>
           <a:p>
             <a:r>
               <a:rPr sz="1400"/>
-              <a:t>f2 · Net revenue retention · nrr_quarter · main.cs.revenue_monthly · statement duckdb-4e74ade4ee1f · as of 2026-10-16 17:45 UTC</a:t>
+              <a:t>f2 · Monthly NRR (weighted) · nrr_quarter · main.cs.revenue_monthly · statement duckdb-5075d99a6ed2 · queried 2026-10-18 04:18 UTC</a:t>
             </a:r>
           </a:p>
           <a:p>
             <a:r>
               <a:rPr sz="1400"/>
-              <a:t>f3 · Active subscriptions · active_subscriptions · main.cs.churn_monthly · statement duckdb-7bb33ad98091 · as of 2026-10-16 17:45 UTC</a:t>
+              <a:t>f3 · Active subscriptions · active_subscriptions · main.cs.churn_monthly · statement duckdb-f73e339fbd2f · queried 2026-10-18 04:18 UTC</a:t>
             </a:r>
           </a:p>
           <a:p>
             <a:r>
               <a:rPr sz="1400"/>
-              <a:t>f4 · Monthly churn · churn_trend_monthly · main.cs.churn_monthly · statement duckdb-e7add026665b · as of 2026-10-16 17:45 UTC</a:t>
+              <a:t>f4 · Monthly churn · churn_trend_monthly · main.cs.churn_monthly · statement duckdb-652fcac2b08a · queried 2026-10-18 04:18 UTC</a:t>
             </a:r>
           </a:p>
           <a:p>
             <a:r>
               <a:rPr sz="1400"/>
-              <a:t>f5 · Churn by segment · churn_by_segment · main.cs.churn_monthly · statement duckdb-f9d854e6ef09 · as of 2026-10-16 17:45 UTC</a:t>
+              <a:t>f5 · Weighted monthly churn by segment · churn_by_segment · main.cs.churn_monthly · statement duckdb-f610159e247c · queried 2026-10-18 04:18 UTC</a:t>
             </a:r>
           </a:p>
         </p:txBody>

--- a/docs/examples/sample-deck.pptx
+++ b/docs/examples/sample-deck.pptx
@@ -11,7 +11,7 @@
     <p:sldId id="259" r:id="rId11"/>
     <p:sldId id="260" r:id="rId12"/>
   </p:sldIdLst>
-  <p:sldSz cx="12191695" cy="6858000" type="screen4x3"/>
+  <p:sldSz cx="12192000" cy="6858000" type="screen4x3"/>
   <p:notesSz cx="6858000" cy="9144000"/>
   <p:defaultTextStyle>
     <a:defPPr>
@@ -115,7 +115,7 @@
 <c:chartSpace xmlns:c="http://schemas.openxmlformats.org/drawingml/2006/chart" xmlns:a="http://schemas.openxmlformats.org/drawingml/2006/main" xmlns:r="http://schemas.openxmlformats.org/officeDocument/2006/relationships">
   <c:date1904 val="0"/>
   <c:chart>
-    <c:autoTitleDeleted val="0"/>
+    <c:autoTitleDeleted val="1"/>
     <c:plotArea>
       <c:lineChart>
         <c:grouping val="standard"/>
@@ -134,6 +134,145 @@
               </c:strCache>
             </c:strRef>
           </c:tx>
+          <c:spPr>
+            <a:ln w="28575">
+              <a:solidFill>
+                <a:srgbClr val="1A3144"/>
+              </a:solidFill>
+            </a:ln>
+          </c:spPr>
+          <c:marker>
+            <c:symbol val="circle"/>
+            <c:size val="8"/>
+            <c:spPr>
+              <a:solidFill>
+                <a:srgbClr val="1A3144"/>
+              </a:solidFill>
+              <a:ln>
+                <a:noFill/>
+              </a:ln>
+            </c:spPr>
+          </c:marker>
+          <c:dPt>
+            <c:idx val="0"/>
+            <c:marker>
+              <c:spPr>
+                <a:solidFill>
+                  <a:srgbClr val="1A3144"/>
+                </a:solidFill>
+                <a:ln>
+                  <a:noFill/>
+                </a:ln>
+              </c:spPr>
+            </c:marker>
+          </c:dPt>
+          <c:dPt>
+            <c:idx val="1"/>
+            <c:marker>
+              <c:spPr>
+                <a:solidFill>
+                  <a:srgbClr val="1A3144"/>
+                </a:solidFill>
+                <a:ln>
+                  <a:noFill/>
+                </a:ln>
+              </c:spPr>
+            </c:marker>
+          </c:dPt>
+          <c:dPt>
+            <c:idx val="2"/>
+            <c:marker>
+              <c:spPr>
+                <a:solidFill>
+                  <a:srgbClr val="9C4221"/>
+                </a:solidFill>
+                <a:ln>
+                  <a:noFill/>
+                </a:ln>
+              </c:spPr>
+            </c:marker>
+          </c:dPt>
+          <c:dLbls>
+            <c:dLbl>
+              <c:idx val="0"/>
+              <c:spPr/>
+              <c:txPr>
+                <a:bodyPr/>
+                <a:lstStyle/>
+                <a:p>
+                  <a:pPr>
+                    <a:defRPr sz="1100" b="0">
+                      <a:solidFill>
+                        <a:srgbClr val="1C1915"/>
+                      </a:solidFill>
+                      <a:latin typeface="Calibri"/>
+                    </a:defRPr>
+                  </a:pPr>
+                </a:p>
+              </c:txPr>
+              <c:showLegendKey val="0"/>
+              <c:showVal val="1"/>
+              <c:showCatName val="0"/>
+              <c:showSerName val="0"/>
+              <c:showPercent val="0"/>
+              <c:showBubbleSize val="0"/>
+            </c:dLbl>
+            <c:dLbl>
+              <c:idx val="1"/>
+              <c:spPr/>
+              <c:txPr>
+                <a:bodyPr/>
+                <a:lstStyle/>
+                <a:p>
+                  <a:pPr>
+                    <a:defRPr sz="1100" b="0">
+                      <a:solidFill>
+                        <a:srgbClr val="1C1915"/>
+                      </a:solidFill>
+                      <a:latin typeface="Calibri"/>
+                    </a:defRPr>
+                  </a:pPr>
+                </a:p>
+              </c:txPr>
+              <c:showLegendKey val="0"/>
+              <c:showVal val="1"/>
+              <c:showCatName val="0"/>
+              <c:showSerName val="0"/>
+              <c:showPercent val="0"/>
+              <c:showBubbleSize val="0"/>
+            </c:dLbl>
+            <c:dLbl>
+              <c:idx val="2"/>
+              <c:spPr/>
+              <c:txPr>
+                <a:bodyPr/>
+                <a:lstStyle/>
+                <a:p>
+                  <a:pPr>
+                    <a:defRPr sz="1200" b="1">
+                      <a:solidFill>
+                        <a:srgbClr val="9C4221"/>
+                      </a:solidFill>
+                      <a:latin typeface="Calibri"/>
+                    </a:defRPr>
+                  </a:pPr>
+                </a:p>
+              </c:txPr>
+              <c:showLegendKey val="0"/>
+              <c:showVal val="1"/>
+              <c:showCatName val="0"/>
+              <c:showSerName val="0"/>
+              <c:showPercent val="0"/>
+              <c:showBubbleSize val="0"/>
+            </c:dLbl>
+            <c:showLegendKey val="0"/>
+            <c:showVal val="0"/>
+            <c:showCatName val="0"/>
+            <c:showSerName val="0"/>
+            <c:showPercent val="0"/>
+            <c:showBubbleSize val="0"/>
+            <c:showLeaderLines val="1"/>
+          </c:dLbls>
           <c:cat>
             <c:strRef>
               <c:f>Sheet1!$A$2:$A$4</c:f>
@@ -171,6 +310,31 @@
           </c:val>
           <c:smooth val="0"/>
         </c:ser>
+        <c:dLbls>
+          <c:numFmt formatCode="0.0%" sourceLinked="0"/>
+          <c:txPr>
+            <a:bodyPr/>
+            <a:lstStyle/>
+            <a:p>
+              <a:pPr>
+                <a:defRPr sz="1100">
+                  <a:solidFill>
+                    <a:srgbClr val="1C1915"/>
+                  </a:solidFill>
+                  <a:latin typeface="Calibri"/>
+                </a:defRPr>
+              </a:pPr>
+            </a:p>
+          </c:txPr>
+          <c:dLblPos val="t"/>
+          <c:showLegendKey val="0"/>
+          <c:showVal val="1"/>
+          <c:showCatName val="0"/>
+          <c:showSerName val="0"/>
+          <c:showPercent val="0"/>
+          <c:showBubbleSize val="0"/>
+          <c:showLeaderLines val="1"/>
+        </c:dLbls>
         <c:marker val="1"/>
         <c:smooth val="0"/>
         <c:axId val="2118791784"/>
@@ -183,9 +347,30 @@
         </c:scaling>
         <c:delete val="0"/>
         <c:axPos val="b"/>
-        <c:majorTickMark val="out"/>
+        <c:majorTickMark val="none"/>
         <c:minorTickMark val="none"/>
         <c:tickLblPos val="nextTo"/>
+        <c:spPr>
+          <a:ln>
+            <a:solidFill>
+              <a:srgbClr val="E3DCD0"/>
+            </a:solidFill>
+          </a:ln>
+        </c:spPr>
+        <c:txPr>
+          <a:bodyPr/>
+          <a:lstStyle/>
+          <a:p>
+            <a:pPr>
+              <a:defRPr sz="1200">
+                <a:solidFill>
+                  <a:srgbClr val="1C1915"/>
+                </a:solidFill>
+                <a:latin typeface="Calibri"/>
+              </a:defRPr>
+            </a:pPr>
+          </a:p>
+        </c:txPr>
         <c:crossAx val="2140495176"/>
         <c:crosses val="autoZero"/>
         <c:auto val="1"/>
@@ -195,13 +380,20 @@
       </c:catAx>
       <c:valAx>
         <c:axId val="2140495176"/>
-        <c:scaling/>
-        <c:delete val="0"/>
+        <c:scaling>
+          <c:max val="0.02562734479891802"/>
+          <c:min val="0.021401826564709563"/>
+        </c:scaling>
+        <c:delete/>
         <c:axPos val="l"/>
-        <c:majorGridlines/>
-        <c:majorTickMark val="out"/>
+        <c:majorTickMark val="none"/>
         <c:minorTickMark val="none"/>
         <c:tickLblPos val="nextTo"/>
+        <c:spPr>
+          <a:ln>
+            <a:noFill/>
+          </a:ln>
+        </c:spPr>
         <c:crossAx val="2118791784"/>
         <c:crosses val="autoZero"/>
       </c:valAx>
@@ -230,11 +422,12 @@
 <c:chartSpace xmlns:c="http://schemas.openxmlformats.org/drawingml/2006/chart" xmlns:a="http://schemas.openxmlformats.org/drawingml/2006/main" xmlns:r="http://schemas.openxmlformats.org/officeDocument/2006/relationships">
   <c:date1904 val="0"/>
   <c:chart>
-    <c:autoTitleDeleted val="0"/>
+    <c:autoTitleDeleted val="1"/>
     <c:plotArea>
       <c:barChart>
         <c:barDir val="bar"/>
         <c:grouping val="clustered"/>
+        <c:varyColors val="0"/>
         <c:ser>
           <c:idx val="0"/>
           <c:order val="0"/>
@@ -249,6 +442,128 @@
               </c:strCache>
             </c:strRef>
           </c:tx>
+          <c:spPr>
+            <a:solidFill>
+              <a:srgbClr val="1A3144"/>
+            </a:solidFill>
+            <a:ln>
+              <a:noFill/>
+            </a:ln>
+          </c:spPr>
+          <c:dPt>
+            <c:idx val="0"/>
+            <c:spPr>
+              <a:solidFill>
+                <a:srgbClr val="1A3144"/>
+              </a:solidFill>
+              <a:ln>
+                <a:noFill/>
+              </a:ln>
+            </c:spPr>
+          </c:dPt>
+          <c:dPt>
+            <c:idx val="1"/>
+            <c:spPr>
+              <a:solidFill>
+                <a:srgbClr val="1A3144"/>
+              </a:solidFill>
+              <a:ln>
+                <a:noFill/>
+              </a:ln>
+            </c:spPr>
+          </c:dPt>
+          <c:dPt>
+            <c:idx val="2"/>
+            <c:spPr>
+              <a:solidFill>
+                <a:srgbClr val="9C4221"/>
+              </a:solidFill>
+              <a:ln>
+                <a:noFill/>
+              </a:ln>
+            </c:spPr>
+          </c:dPt>
+          <c:dLbls>
+            <c:dLbl>
+              <c:idx val="0"/>
+              <c:spPr/>
+              <c:txPr>
+                <a:bodyPr/>
+                <a:lstStyle/>
+                <a:p>
+                  <a:pPr>
+                    <a:defRPr sz="1100" b="0">
+                      <a:solidFill>
+                        <a:srgbClr val="1C1915"/>
+                      </a:solidFill>
+                      <a:latin typeface="Calibri"/>
+                    </a:defRPr>
+                  </a:pPr>
+                </a:p>
+              </c:txPr>
+              <c:showLegendKey val="0"/>
+              <c:showVal val="1"/>
+              <c:showCatName val="0"/>
+              <c:showSerName val="0"/>
+              <c:showPercent val="0"/>
+              <c:showBubbleSize val="0"/>
+            </c:dLbl>
+            <c:dLbl>
+              <c:idx val="1"/>
+              <c:spPr/>
+              <c:txPr>
+                <a:bodyPr/>
+                <a:lstStyle/>
+                <a:p>
+                  <a:pPr>
+                    <a:defRPr sz="1100" b="0">
+                      <a:solidFill>
+                        <a:srgbClr val="1C1915"/>
+                      </a:solidFill>
+                      <a:latin typeface="Calibri"/>
+                    </a:defRPr>
+                  </a:pPr>
+                </a:p>
+              </c:txPr>
+              <c:showLegendKey val="0"/>
+              <c:showVal val="1"/>
+              <c:showCatName val="0"/>
+              <c:showSerName val="0"/>
+              <c:showPercent val="0"/>
+              <c:showBubbleSize val="0"/>
+            </c:dLbl>
+            <c:dLbl>
+              <c:idx val="2"/>
+              <c:spPr/>
+              <c:txPr>
+                <a:bodyPr/>
+                <a:lstStyle/>
+                <a:p>
+                  <a:pPr>
+                    <a:defRPr sz="1200" b="1">
+                      <a:solidFill>
+                        <a:srgbClr val="9C4221"/>
+                      </a:solidFill>
+                      <a:latin typeface="Calibri"/>
+                    </a:defRPr>
+                  </a:pPr>
+                </a:p>
+              </c:txPr>
+              <c:showLegendKey val="0"/>
+              <c:showVal val="1"/>
+              <c:showCatName val="0"/>
+              <c:showSerName val="0"/>
+              <c:showPercent val="0"/>
+              <c:showBubbleSize val="0"/>
+            </c:dLbl>
+            <c:showLegendKey val="0"/>
+            <c:showVal val="0"/>
+            <c:showCatName val="0"/>
+            <c:showSerName val="0"/>
+            <c:showPercent val="0"/>
+            <c:showBubbleSize val="0"/>
+            <c:showLeaderLines val="1"/>
+          </c:dLbls>
           <c:cat>
             <c:strRef>
               <c:f>Sheet1!$A$2:$A$4</c:f>
@@ -285,6 +600,32 @@
             </c:numRef>
           </c:val>
         </c:ser>
+        <c:dLbls>
+          <c:numFmt formatCode="0.0%" sourceLinked="0"/>
+          <c:txPr>
+            <a:bodyPr/>
+            <a:lstStyle/>
+            <a:p>
+              <a:pPr>
+                <a:defRPr sz="1100">
+                  <a:solidFill>
+                    <a:srgbClr val="1C1915"/>
+                  </a:solidFill>
+                  <a:latin typeface="Calibri"/>
+                </a:defRPr>
+              </a:pPr>
+            </a:p>
+          </c:txPr>
+          <c:dLblPos val="r"/>
+          <c:showLegendKey val="0"/>
+          <c:showVal val="1"/>
+          <c:showCatName val="0"/>
+          <c:showSerName val="0"/>
+          <c:showPercent val="0"/>
+          <c:showBubbleSize val="0"/>
+          <c:showLeaderLines val="1"/>
+        </c:dLbls>
+        <c:gapWidth val="80"/>
         <c:axId val="-2068027336"/>
         <c:axId val="-2113994440"/>
       </c:barChart>
@@ -295,9 +636,30 @@
         </c:scaling>
         <c:delete val="0"/>
         <c:axPos val="l"/>
-        <c:majorTickMark val="out"/>
+        <c:majorTickMark val="none"/>
         <c:minorTickMark val="none"/>
         <c:tickLblPos val="nextTo"/>
+        <c:spPr>
+          <a:ln>
+            <a:solidFill>
+              <a:srgbClr val="E3DCD0"/>
+            </a:solidFill>
+          </a:ln>
+        </c:spPr>
+        <c:txPr>
+          <a:bodyPr/>
+          <a:lstStyle/>
+          <a:p>
+            <a:pPr>
+              <a:defRPr sz="1200">
+                <a:solidFill>
+                  <a:srgbClr val="1C1915"/>
+                </a:solidFill>
+                <a:latin typeface="Calibri"/>
+              </a:defRPr>
+            </a:pPr>
+          </a:p>
+        </c:txPr>
         <c:crossAx val="-2113994440"/>
         <c:crosses val="autoZero"/>
         <c:auto val="1"/>
@@ -307,13 +669,20 @@
       </c:catAx>
       <c:valAx>
         <c:axId val="-2113994440"/>
-        <c:scaling/>
-        <c:delete val="0"/>
+        <c:scaling>
+          <c:max val="0.04052836052836053"/>
+          <c:min val="0.0"/>
+        </c:scaling>
+        <c:delete/>
         <c:axPos val="b"/>
-        <c:majorGridlines/>
-        <c:majorTickMark val="out"/>
+        <c:majorTickMark val="none"/>
         <c:minorTickMark val="none"/>
         <c:tickLblPos val="nextTo"/>
+        <c:spPr>
+          <a:ln>
+            <a:noFill/>
+          </a:ln>
+        </c:spPr>
         <c:crossAx val="-2068027336"/>
         <c:crosses val="autoZero"/>
       </c:valAx>
@@ -801,17 +1170,17 @@
           <a:lstStyle/>
           <a:p>
             <a:r>
-              <a:t>f1 · Monthly churn (weighted) · churn_rate_quarter · main.cs.churn_monthly · statement duckdb-eed72c8e07d1 · queried 2026-10-18 04:18 UTC</a:t>
-            </a:r>
-          </a:p>
-          <a:p>
-            <a:r>
-              <a:t>f2 · Monthly NRR (weighted) · nrr_quarter · main.cs.revenue_monthly · statement duckdb-5075d99a6ed2 · queried 2026-10-18 04:18 UTC</a:t>
-            </a:r>
-          </a:p>
-          <a:p>
-            <a:r>
-              <a:t>f3 · Active subscriptions · active_subscriptions · main.cs.churn_monthly · statement duckdb-f73e339fbd2f · queried 2026-10-18 04:18 UTC</a:t>
+              <a:t>f1 · Monthly churn (weighted) · churn_rate_quarter · main.cs.churn_monthly · statement duckdb-340e134303f9 · queried 2026-10-18 07:24 UTC</a:t>
+            </a:r>
+          </a:p>
+          <a:p>
+            <a:r>
+              <a:t>f2 · Monthly NRR (weighted) · nrr_quarter · main.cs.revenue_monthly · statement duckdb-b591257632fc · queried 2026-10-18 07:24 UTC</a:t>
+            </a:r>
+          </a:p>
+          <a:p>
+            <a:r>
+              <a:t>f3 · Active subscriptions · active_subscriptions · main.cs.churn_monthly · statement duckdb-e8b898c41384 · queried 2026-10-18 07:24 UTC</a:t>
             </a:r>
           </a:p>
           <a:p>
@@ -941,7 +1310,7 @@
           <a:lstStyle/>
           <a:p>
             <a:r>
-              <a:t>f4 · Monthly churn · churn_trend_monthly · main.cs.churn_monthly · statement duckdb-652fcac2b08a · queried 2026-10-18 04:18 UTC</a:t>
+              <a:t>f4 · Monthly churn · churn_trend_monthly · main.cs.churn_monthly · statement duckdb-a0f80dfe22cb · queried 2026-10-18 07:24 UTC</a:t>
             </a:r>
           </a:p>
           <a:p>
@@ -1031,7 +1400,7 @@
           <a:lstStyle/>
           <a:p>
             <a:r>
-              <a:t>f5 · Weighted monthly churn by segment · churn_by_segment · main.cs.churn_monthly · statement duckdb-f610159e247c · queried 2026-10-18 04:18 UTC</a:t>
+              <a:t>f5 · Weighted monthly churn by segment · churn_by_segment · main.cs.churn_monthly · statement duckdb-1b44996c3695 · queried 2026-10-18 07:24 UTC</a:t>
             </a:r>
           </a:p>
           <a:p>
@@ -1121,27 +1490,27 @@
           <a:lstStyle/>
           <a:p>
             <a:r>
-              <a:t>f1 · Monthly churn (weighted) · churn_rate_quarter · main.cs.churn_monthly · statement duckdb-eed72c8e07d1 · queried 2026-10-18 04:18 UTC</a:t>
-            </a:r>
-          </a:p>
-          <a:p>
-            <a:r>
-              <a:t>f2 · Monthly NRR (weighted) · nrr_quarter · main.cs.revenue_monthly · statement duckdb-5075d99a6ed2 · queried 2026-10-18 04:18 UTC</a:t>
-            </a:r>
-          </a:p>
-          <a:p>
-            <a:r>
-              <a:t>f3 · Active subscriptions · active_subscriptions · main.cs.churn_monthly · statement duckdb-f73e339fbd2f · queried 2026-10-18 04:18 UTC</a:t>
-            </a:r>
-          </a:p>
-          <a:p>
-            <a:r>
-              <a:t>f4 · Monthly churn · churn_trend_monthly · main.cs.churn_monthly · statement duckdb-652fcac2b08a · queried 2026-10-18 04:18 UTC</a:t>
-            </a:r>
-          </a:p>
-          <a:p>
-            <a:r>
-              <a:t>f5 · Weighted monthly churn by segment · churn_by_segment · main.cs.churn_monthly · statement duckdb-f610159e247c · queried 2026-10-18 04:18 UTC</a:t>
+              <a:t>f1 · Monthly churn (weighted) · churn_rate_quarter · main.cs.churn_monthly · statement duckdb-340e134303f9 · queried 2026-10-18 07:24 UTC</a:t>
+            </a:r>
+          </a:p>
+          <a:p>
+            <a:r>
+              <a:t>f2 · Monthly NRR (weighted) · nrr_quarter · main.cs.revenue_monthly · statement duckdb-b591257632fc · queried 2026-10-18 07:24 UTC</a:t>
+            </a:r>
+          </a:p>
+          <a:p>
+            <a:r>
+              <a:t>f3 · Active subscriptions · active_subscriptions · main.cs.churn_monthly · statement duckdb-e8b898c41384 · queried 2026-10-18 07:24 UTC</a:t>
+            </a:r>
+          </a:p>
+          <a:p>
+            <a:r>
+              <a:t>f4 · Monthly churn · churn_trend_monthly · main.cs.churn_monthly · statement duckdb-a0f80dfe22cb · queried 2026-10-18 07:24 UTC</a:t>
+            </a:r>
+          </a:p>
+          <a:p>
+            <a:r>
+              <a:t>f5 · Weighted monthly churn by segment · churn_by_segment · main.cs.churn_monthly · statement duckdb-1b44996c3695 · queried 2026-10-18 07:24 UTC</a:t>
             </a:r>
           </a:p>
           <a:p>
@@ -4240,6 +4609,14 @@
 <file path=ppt/slides/slide1.xml><?xml version="1.0" encoding="utf-8"?>
 <p:sld xmlns:a="http://schemas.openxmlformats.org/drawingml/2006/main" xmlns:p="http://schemas.openxmlformats.org/presentationml/2006/main" xmlns:r="http://schemas.openxmlformats.org/officeDocument/2006/relationships">
   <p:cSld>
+    <p:bg>
+      <p:bgPr>
+        <a:solidFill>
+          <a:srgbClr val="1A3144"/>
+        </a:solidFill>
+        <a:effectLst/>
+      </p:bgPr>
+    </p:bg>
     <p:spTree>
       <p:nvGrpSpPr>
         <p:cNvPr id="1" name=""/>
@@ -4249,42 +4626,323 @@
       <p:grpSpPr/>
       <p:sp>
         <p:nvSpPr>
-          <p:cNvPr id="2" name="Title 1"/>
-          <p:cNvSpPr>
-            <a:spLocks noGrp="1"/>
-          </p:cNvSpPr>
-          <p:nvPr>
-            <p:ph type="ctrTitle"/>
-          </p:nvPr>
-        </p:nvSpPr>
-        <p:spPr/>
-        <p:txBody>
-          <a:bodyPr/>
-          <a:lstStyle/>
-          <a:p>
-            <a:r>
-              <a:t>Customer retention review</a:t>
-            </a:r>
-          </a:p>
-        </p:txBody>
-      </p:sp>
-      <p:sp>
-        <p:nvSpPr>
-          <p:cNvPr id="3" name="Subtitle 2"/>
-          <p:cNvSpPr>
-            <a:spLocks noGrp="1"/>
-          </p:cNvSpPr>
-          <p:nvPr>
-            <p:ph type="subTitle" idx="1"/>
-          </p:nvPr>
-        </p:nvSpPr>
-        <p:spPr/>
-        <p:txBody>
-          <a:bodyPr/>
-          <a:lstStyle/>
-          <a:p>
-            <a:r>
+          <p:cNvPr id="2" name="Rectangle 1"/>
+          <p:cNvSpPr/>
+          <p:nvPr/>
+        </p:nvSpPr>
+        <p:spPr>
+          <a:xfrm>
+            <a:off x="7071359" y="0"/>
+            <a:ext cx="5120641" cy="6858000"/>
+          </a:xfrm>
+          <a:prstGeom prst="rect">
+            <a:avLst/>
+          </a:prstGeom>
+          <a:solidFill>
+            <a:srgbClr val="F4F0E8"/>
+          </a:solidFill>
+          <a:ln>
+            <a:noFill/>
+          </a:ln>
+        </p:spPr>
+        <p:style>
+          <a:lnRef idx="1">
+            <a:schemeClr val="accent1"/>
+          </a:lnRef>
+          <a:fillRef idx="3">
+            <a:schemeClr val="accent1"/>
+          </a:fillRef>
+          <a:effectRef idx="2">
+            <a:schemeClr val="accent1"/>
+          </a:effectRef>
+          <a:fontRef idx="minor">
+            <a:schemeClr val="lt1"/>
+          </a:fontRef>
+        </p:style>
+        <p:txBody>
+          <a:bodyPr rtlCol="0" anchor="ctr"/>
+          <a:lstStyle/>
+          <a:p>
+            <a:pPr algn="ctr"/>
+          </a:p>
+        </p:txBody>
+      </p:sp>
+      <p:sp>
+        <p:nvSpPr>
+          <p:cNvPr id="3" name="Rectangle 2"/>
+          <p:cNvSpPr/>
+          <p:nvPr/>
+        </p:nvSpPr>
+        <p:spPr>
+          <a:xfrm>
+            <a:off x="7016495" y="0"/>
+            <a:ext cx="54864" cy="6858000"/>
+          </a:xfrm>
+          <a:prstGeom prst="rect">
+            <a:avLst/>
+          </a:prstGeom>
+          <a:solidFill>
+            <a:srgbClr val="9C4221"/>
+          </a:solidFill>
+          <a:ln>
+            <a:noFill/>
+          </a:ln>
+        </p:spPr>
+        <p:style>
+          <a:lnRef idx="1">
+            <a:schemeClr val="accent1"/>
+          </a:lnRef>
+          <a:fillRef idx="3">
+            <a:schemeClr val="accent1"/>
+          </a:fillRef>
+          <a:effectRef idx="2">
+            <a:schemeClr val="accent1"/>
+          </a:effectRef>
+          <a:fontRef idx="minor">
+            <a:schemeClr val="lt1"/>
+          </a:fontRef>
+        </p:style>
+        <p:txBody>
+          <a:bodyPr rtlCol="0" anchor="ctr"/>
+          <a:lstStyle/>
+          <a:p>
+            <a:pPr algn="ctr"/>
+          </a:p>
+        </p:txBody>
+      </p:sp>
+      <p:sp>
+        <p:nvSpPr>
+          <p:cNvPr id="4" name="TextBox 3"/>
+          <p:cNvSpPr txBox="1"/>
+          <p:nvPr/>
+        </p:nvSpPr>
+        <p:spPr>
+          <a:xfrm>
+            <a:off x="566928" y="6035040"/>
+            <a:ext cx="1828800" cy="274320"/>
+          </a:xfrm>
+          <a:prstGeom prst="rect">
+            <a:avLst/>
+          </a:prstGeom>
+          <a:noFill/>
+        </p:spPr>
+        <p:txBody>
+          <a:bodyPr wrap="square" lIns="0" rIns="0" tIns="0" bIns="0" anchor="t"/>
+          <a:lstStyle/>
+          <a:p>
+            <a:pPr algn="l">
+              <a:lnSpc>
+                <a:spcPct val="100000"/>
+              </a:lnSpc>
+              <a:spcBef>
+                <a:spcPts val="0"/>
+              </a:spcBef>
+              <a:spcAft>
+                <a:spcPts val="0"/>
+              </a:spcAft>
+            </a:pPr>
+            <a:r>
+              <a:rPr sz="1200" b="0">
+                <a:solidFill>
+                  <a:srgbClr val="C5D0D6"/>
+                </a:solidFill>
+                <a:latin typeface="Calibri"/>
+              </a:rPr>
+              <a:t>DeckSmith</a:t>
+            </a:r>
+          </a:p>
+        </p:txBody>
+      </p:sp>
+      <p:sp>
+        <p:nvSpPr>
+          <p:cNvPr id="5" name="TextBox 4"/>
+          <p:cNvSpPr txBox="1"/>
+          <p:nvPr/>
+        </p:nvSpPr>
+        <p:spPr>
+          <a:xfrm>
+            <a:off x="566928" y="2057400"/>
+            <a:ext cx="6367271" cy="2011680"/>
+          </a:xfrm>
+          <a:prstGeom prst="rect">
+            <a:avLst/>
+          </a:prstGeom>
+          <a:noFill/>
+        </p:spPr>
+        <p:txBody>
+          <a:bodyPr wrap="square" lIns="0" rIns="0" tIns="0" bIns="0" anchor="t"/>
+          <a:lstStyle/>
+          <a:p>
+            <a:pPr algn="l">
+              <a:lnSpc>
+                <a:spcPct val="100000"/>
+              </a:lnSpc>
+              <a:spcBef>
+                <a:spcPts val="0"/>
+              </a:spcBef>
+              <a:spcAft>
+                <a:spcPts val="0"/>
+              </a:spcAft>
+            </a:pPr>
+            <a:r>
+              <a:rPr sz="4400" b="0">
+                <a:solidFill>
+                  <a:srgbClr val="F4F0E8"/>
+                </a:solidFill>
+                <a:latin typeface="Georgia"/>
+              </a:rPr>
+              <a:t>Customer retention</a:t>
+            </a:r>
+          </a:p>
+          <a:p>
+            <a:pPr algn="l">
+              <a:lnSpc>
+                <a:spcPct val="100000"/>
+              </a:lnSpc>
+              <a:spcBef>
+                <a:spcPts val="0"/>
+              </a:spcBef>
+              <a:spcAft>
+                <a:spcPts val="0"/>
+              </a:spcAft>
+            </a:pPr>
+            <a:r>
+              <a:rPr sz="4400" b="0">
+                <a:solidFill>
+                  <a:srgbClr val="F4F0E8"/>
+                </a:solidFill>
+                <a:latin typeface="Georgia"/>
+              </a:rPr>
+              <a:t>review</a:t>
+            </a:r>
+          </a:p>
+        </p:txBody>
+      </p:sp>
+      <p:sp>
+        <p:nvSpPr>
+          <p:cNvPr id="6" name="TextBox 5"/>
+          <p:cNvSpPr txBox="1"/>
+          <p:nvPr/>
+        </p:nvSpPr>
+        <p:spPr>
+          <a:xfrm>
+            <a:off x="566928" y="4160520"/>
+            <a:ext cx="6367271" cy="731520"/>
+          </a:xfrm>
+          <a:prstGeom prst="rect">
+            <a:avLst/>
+          </a:prstGeom>
+          <a:noFill/>
+        </p:spPr>
+        <p:txBody>
+          <a:bodyPr wrap="square" lIns="0" rIns="0" tIns="0" bIns="0" anchor="t"/>
+          <a:lstStyle/>
+          <a:p>
+            <a:pPr algn="l">
+              <a:lnSpc>
+                <a:spcPct val="100000"/>
+              </a:lnSpc>
+              <a:spcBef>
+                <a:spcPts val="0"/>
+              </a:spcBef>
+              <a:spcAft>
+                <a:spcPts val="0"/>
+              </a:spcAft>
+            </a:pPr>
+            <a:r>
+              <a:rPr sz="1800" b="0">
+                <a:solidFill>
+                  <a:srgbClr val="C5D0D6"/>
+                </a:solidFill>
+                <a:latin typeface="Calibri"/>
+              </a:rPr>
               <a:t>Prepared for the exec audience</a:t>
+            </a:r>
+          </a:p>
+        </p:txBody>
+      </p:sp>
+      <p:sp>
+        <p:nvSpPr>
+          <p:cNvPr id="7" name="Oval 6"/>
+          <p:cNvSpPr/>
+          <p:nvPr/>
+        </p:nvSpPr>
+        <p:spPr>
+          <a:xfrm>
+            <a:off x="8808719" y="2606040"/>
+            <a:ext cx="1645920" cy="1645920"/>
+          </a:xfrm>
+          <a:prstGeom prst="ellipse">
+            <a:avLst/>
+          </a:prstGeom>
+          <a:noFill/>
+          <a:ln w="15875">
+            <a:solidFill>
+              <a:srgbClr val="9C4221"/>
+            </a:solidFill>
+          </a:ln>
+        </p:spPr>
+        <p:style>
+          <a:lnRef idx="1">
+            <a:schemeClr val="accent1"/>
+          </a:lnRef>
+          <a:fillRef idx="3">
+            <a:schemeClr val="accent1"/>
+          </a:fillRef>
+          <a:effectRef idx="2">
+            <a:schemeClr val="accent1"/>
+          </a:effectRef>
+          <a:fontRef idx="minor">
+            <a:schemeClr val="lt1"/>
+          </a:fontRef>
+        </p:style>
+        <p:txBody>
+          <a:bodyPr rtlCol="0" anchor="ctr"/>
+          <a:lstStyle/>
+          <a:p>
+            <a:pPr algn="ctr"/>
+          </a:p>
+        </p:txBody>
+      </p:sp>
+      <p:sp>
+        <p:nvSpPr>
+          <p:cNvPr id="8" name="TextBox 7"/>
+          <p:cNvSpPr txBox="1"/>
+          <p:nvPr/>
+        </p:nvSpPr>
+        <p:spPr>
+          <a:xfrm>
+            <a:off x="5864351" y="6483096"/>
+            <a:ext cx="640080" cy="292608"/>
+          </a:xfrm>
+          <a:prstGeom prst="rect">
+            <a:avLst/>
+          </a:prstGeom>
+          <a:noFill/>
+        </p:spPr>
+        <p:txBody>
+          <a:bodyPr wrap="square" lIns="0" rIns="0" tIns="0" bIns="0" anchor="t"/>
+          <a:lstStyle/>
+          <a:p>
+            <a:pPr algn="r">
+              <a:lnSpc>
+                <a:spcPct val="100000"/>
+              </a:lnSpc>
+              <a:spcBef>
+                <a:spcPts val="0"/>
+              </a:spcBef>
+              <a:spcAft>
+                <a:spcPts val="0"/>
+              </a:spcAft>
+            </a:pPr>
+            <a:r>
+              <a:rPr sz="1300" b="0">
+                <a:solidFill>
+                  <a:srgbClr val="F4F0E8"/>
+                </a:solidFill>
+                <a:latin typeface="Georgia"/>
+              </a:rPr>
+              <a:t>I</a:t>
             </a:r>
           </a:p>
         </p:txBody>
@@ -4300,6 +4958,14 @@
 <file path=ppt/slides/slide2.xml><?xml version="1.0" encoding="utf-8"?>
 <p:sld xmlns:a="http://schemas.openxmlformats.org/drawingml/2006/main" xmlns:p="http://schemas.openxmlformats.org/presentationml/2006/main" xmlns:r="http://schemas.openxmlformats.org/officeDocument/2006/relationships">
   <p:cSld>
+    <p:bg>
+      <p:bgPr>
+        <a:solidFill>
+          <a:srgbClr val="F4F0E8"/>
+        </a:solidFill>
+        <a:effectLst/>
+      </p:bgPr>
+    </p:bg>
     <p:spTree>
       <p:nvGrpSpPr>
         <p:cNvPr id="1" name=""/>
@@ -4309,35 +4975,14 @@
       <p:grpSpPr/>
       <p:sp>
         <p:nvSpPr>
-          <p:cNvPr id="2" name="Title 1"/>
-          <p:cNvSpPr>
-            <a:spLocks noGrp="1"/>
-          </p:cNvSpPr>
-          <p:nvPr>
-            <p:ph type="title"/>
-          </p:nvPr>
-        </p:nvSpPr>
-        <p:spPr/>
-        <p:txBody>
-          <a:bodyPr/>
-          <a:lstStyle/>
-          <a:p>
-            <a:r>
-              <a:t>Retention at a glance</a:t>
-            </a:r>
-          </a:p>
-        </p:txBody>
-      </p:sp>
-      <p:sp>
-        <p:nvSpPr>
-          <p:cNvPr id="3" name="TextBox 2"/>
+          <p:cNvPr id="2" name="TextBox 1"/>
           <p:cNvSpPr txBox="1"/>
           <p:nvPr/>
         </p:nvSpPr>
         <p:spPr>
           <a:xfrm>
-            <a:off x="731520" y="1828800"/>
-            <a:ext cx="3393338" cy="2011680"/>
+            <a:off x="566928" y="347472"/>
+            <a:ext cx="11058144" cy="841248"/>
           </a:xfrm>
           <a:prstGeom prst="rect">
             <a:avLst/>
@@ -4345,34 +4990,173 @@
           <a:noFill/>
         </p:spPr>
         <p:txBody>
-          <a:bodyPr wrap="none">
-            <a:spAutoFit/>
-          </a:bodyPr>
-          <a:lstStyle/>
-          <a:p>
-            <a:r>
-              <a:rPr sz="4000" b="1"/>
-              <a:t>2.4%</a:t>
-            </a:r>
-          </a:p>
-          <a:p>
-            <a:r>
-              <a:rPr sz="1600"/>
-              <a:t>Monthly churn (weighted)</a:t>
-            </a:r>
-          </a:p>
-        </p:txBody>
-      </p:sp>
-      <p:sp>
-        <p:nvSpPr>
-          <p:cNvPr id="4" name="TextBox 3"/>
+          <a:bodyPr wrap="square" lIns="0" rIns="0" tIns="0" bIns="0" anchor="b"/>
+          <a:lstStyle/>
+          <a:p>
+            <a:pPr algn="l">
+              <a:lnSpc>
+                <a:spcPct val="100000"/>
+              </a:lnSpc>
+              <a:spcBef>
+                <a:spcPts val="0"/>
+              </a:spcBef>
+              <a:spcAft>
+                <a:spcPts val="0"/>
+              </a:spcAft>
+            </a:pPr>
+            <a:r>
+              <a:rPr sz="2800" b="0">
+                <a:solidFill>
+                  <a:srgbClr val="1C1915"/>
+                </a:solidFill>
+                <a:latin typeface="Georgia"/>
+              </a:rPr>
+              <a:t>Where retention stands</a:t>
+            </a:r>
+          </a:p>
+        </p:txBody>
+      </p:sp>
+      <p:sp>
+        <p:nvSpPr>
+          <p:cNvPr id="3" name="Rectangle 2"/>
+          <p:cNvSpPr/>
+          <p:nvPr/>
+        </p:nvSpPr>
+        <p:spPr>
+          <a:xfrm>
+            <a:off x="566928" y="1234440"/>
+            <a:ext cx="365760" cy="27432"/>
+          </a:xfrm>
+          <a:prstGeom prst="rect">
+            <a:avLst/>
+          </a:prstGeom>
+          <a:solidFill>
+            <a:srgbClr val="9C4221"/>
+          </a:solidFill>
+          <a:ln>
+            <a:noFill/>
+          </a:ln>
+        </p:spPr>
+        <p:style>
+          <a:lnRef idx="1">
+            <a:schemeClr val="accent1"/>
+          </a:lnRef>
+          <a:fillRef idx="3">
+            <a:schemeClr val="accent1"/>
+          </a:fillRef>
+          <a:effectRef idx="2">
+            <a:schemeClr val="accent1"/>
+          </a:effectRef>
+          <a:fontRef idx="minor">
+            <a:schemeClr val="lt1"/>
+          </a:fontRef>
+        </p:style>
+        <p:txBody>
+          <a:bodyPr rtlCol="0" anchor="ctr"/>
+          <a:lstStyle/>
+          <a:p>
+            <a:pPr algn="ctr"/>
+          </a:p>
+        </p:txBody>
+      </p:sp>
+      <p:sp>
+        <p:nvSpPr>
+          <p:cNvPr id="4" name="Rounded Rectangle 3"/>
+          <p:cNvSpPr/>
+          <p:nvPr/>
+        </p:nvSpPr>
+        <p:spPr>
+          <a:xfrm>
+            <a:off x="566928" y="1463040"/>
+            <a:ext cx="3740912" cy="2057400"/>
+          </a:xfrm>
+          <a:prstGeom prst="roundRect">
+            <a:avLst>
+              <a:gd name="adj" fmla="val 8000"/>
+            </a:avLst>
+          </a:prstGeom>
+          <a:solidFill>
+            <a:srgbClr val="FBF9F5"/>
+          </a:solidFill>
+          <a:ln>
+            <a:noFill/>
+          </a:ln>
+        </p:spPr>
+        <p:style>
+          <a:lnRef idx="1">
+            <a:schemeClr val="accent1"/>
+          </a:lnRef>
+          <a:fillRef idx="3">
+            <a:schemeClr val="accent1"/>
+          </a:fillRef>
+          <a:effectRef idx="2">
+            <a:schemeClr val="accent1"/>
+          </a:effectRef>
+          <a:fontRef idx="minor">
+            <a:schemeClr val="lt1"/>
+          </a:fontRef>
+        </p:style>
+        <p:txBody>
+          <a:bodyPr rtlCol="0" anchor="ctr"/>
+          <a:lstStyle/>
+          <a:p>
+            <a:pPr algn="ctr"/>
+          </a:p>
+        </p:txBody>
+      </p:sp>
+      <p:sp>
+        <p:nvSpPr>
+          <p:cNvPr id="5" name="Rectangle 4"/>
+          <p:cNvSpPr/>
+          <p:nvPr/>
+        </p:nvSpPr>
+        <p:spPr>
+          <a:xfrm>
+            <a:off x="566928" y="1463040"/>
+            <a:ext cx="3740912" cy="36576"/>
+          </a:xfrm>
+          <a:prstGeom prst="rect">
+            <a:avLst/>
+          </a:prstGeom>
+          <a:solidFill>
+            <a:srgbClr val="9C4221"/>
+          </a:solidFill>
+          <a:ln>
+            <a:noFill/>
+          </a:ln>
+        </p:spPr>
+        <p:style>
+          <a:lnRef idx="1">
+            <a:schemeClr val="accent1"/>
+          </a:lnRef>
+          <a:fillRef idx="3">
+            <a:schemeClr val="accent1"/>
+          </a:fillRef>
+          <a:effectRef idx="2">
+            <a:schemeClr val="accent1"/>
+          </a:effectRef>
+          <a:fontRef idx="minor">
+            <a:schemeClr val="lt1"/>
+          </a:fontRef>
+        </p:style>
+        <p:txBody>
+          <a:bodyPr rtlCol="0" anchor="ctr"/>
+          <a:lstStyle/>
+          <a:p>
+            <a:pPr algn="ctr"/>
+          </a:p>
+        </p:txBody>
+      </p:sp>
+      <p:sp>
+        <p:nvSpPr>
+          <p:cNvPr id="6" name="TextBox 5"/>
           <p:cNvSpPr txBox="1"/>
           <p:nvPr/>
         </p:nvSpPr>
         <p:spPr>
           <a:xfrm>
-            <a:off x="4399178" y="1828800"/>
-            <a:ext cx="3393338" cy="2011680"/>
+            <a:off x="704088" y="1691640"/>
+            <a:ext cx="3512312" cy="822960"/>
           </a:xfrm>
           <a:prstGeom prst="rect">
             <a:avLst/>
@@ -4380,34 +5164,42 @@
           <a:noFill/>
         </p:spPr>
         <p:txBody>
-          <a:bodyPr wrap="none">
-            <a:spAutoFit/>
-          </a:bodyPr>
-          <a:lstStyle/>
-          <a:p>
-            <a:r>
-              <a:rPr sz="4000" b="1"/>
-              <a:t>99.8%</a:t>
-            </a:r>
-          </a:p>
-          <a:p>
-            <a:r>
-              <a:rPr sz="1600"/>
-              <a:t>Monthly NRR (weighted)</a:t>
-            </a:r>
-          </a:p>
-        </p:txBody>
-      </p:sp>
-      <p:sp>
-        <p:nvSpPr>
-          <p:cNvPr id="5" name="TextBox 4"/>
+          <a:bodyPr wrap="square" lIns="0" rIns="0" tIns="0" bIns="0" anchor="ctr"/>
+          <a:lstStyle/>
+          <a:p>
+            <a:pPr algn="l">
+              <a:lnSpc>
+                <a:spcPct val="100000"/>
+              </a:lnSpc>
+              <a:spcBef>
+                <a:spcPts val="0"/>
+              </a:spcBef>
+              <a:spcAft>
+                <a:spcPts val="0"/>
+              </a:spcAft>
+            </a:pPr>
+            <a:r>
+              <a:rPr sz="4000" b="1">
+                <a:solidFill>
+                  <a:srgbClr val="1C1915"/>
+                </a:solidFill>
+                <a:latin typeface="Georgia"/>
+              </a:rPr>
+              <a:t>2.4%</a:t>
+            </a:r>
+          </a:p>
+        </p:txBody>
+      </p:sp>
+      <p:sp>
+        <p:nvSpPr>
+          <p:cNvPr id="7" name="TextBox 6"/>
           <p:cNvSpPr txBox="1"/>
           <p:nvPr/>
         </p:nvSpPr>
         <p:spPr>
           <a:xfrm>
-            <a:off x="8066836" y="1828800"/>
-            <a:ext cx="3393338" cy="2011680"/>
+            <a:off x="704088" y="2560320"/>
+            <a:ext cx="3512312" cy="640080"/>
           </a:xfrm>
           <a:prstGeom prst="rect">
             <a:avLst/>
@@ -4415,34 +5207,130 @@
           <a:noFill/>
         </p:spPr>
         <p:txBody>
-          <a:bodyPr wrap="none">
-            <a:spAutoFit/>
-          </a:bodyPr>
-          <a:lstStyle/>
-          <a:p>
-            <a:r>
-              <a:rPr sz="4000" b="1"/>
-              <a:t>6,172</a:t>
-            </a:r>
-          </a:p>
-          <a:p>
-            <a:r>
-              <a:rPr sz="1600"/>
-              <a:t>Active subscriptions</a:t>
-            </a:r>
-          </a:p>
-        </p:txBody>
-      </p:sp>
-      <p:sp>
-        <p:nvSpPr>
-          <p:cNvPr id="6" name="TextBox 5"/>
+          <a:bodyPr wrap="square" lIns="0" rIns="0" tIns="0" bIns="0" anchor="t"/>
+          <a:lstStyle/>
+          <a:p>
+            <a:pPr algn="l">
+              <a:lnSpc>
+                <a:spcPct val="100000"/>
+              </a:lnSpc>
+              <a:spcBef>
+                <a:spcPts val="0"/>
+              </a:spcBef>
+              <a:spcAft>
+                <a:spcPts val="0"/>
+              </a:spcAft>
+            </a:pPr>
+            <a:r>
+              <a:rPr sz="1400" b="0">
+                <a:solidFill>
+                  <a:srgbClr val="5C564C"/>
+                </a:solidFill>
+                <a:latin typeface="Calibri"/>
+              </a:rPr>
+              <a:t>Monthly churn (weighted)</a:t>
+            </a:r>
+          </a:p>
+        </p:txBody>
+      </p:sp>
+      <p:sp>
+        <p:nvSpPr>
+          <p:cNvPr id="8" name="Rounded Rectangle 7"/>
+          <p:cNvSpPr/>
+          <p:nvPr/>
+        </p:nvSpPr>
+        <p:spPr>
+          <a:xfrm>
+            <a:off x="4307840" y="1463040"/>
+            <a:ext cx="3740912" cy="2057400"/>
+          </a:xfrm>
+          <a:prstGeom prst="roundRect">
+            <a:avLst>
+              <a:gd name="adj" fmla="val 8000"/>
+            </a:avLst>
+          </a:prstGeom>
+          <a:solidFill>
+            <a:srgbClr val="FBF9F5"/>
+          </a:solidFill>
+          <a:ln>
+            <a:noFill/>
+          </a:ln>
+        </p:spPr>
+        <p:style>
+          <a:lnRef idx="1">
+            <a:schemeClr val="accent1"/>
+          </a:lnRef>
+          <a:fillRef idx="3">
+            <a:schemeClr val="accent1"/>
+          </a:fillRef>
+          <a:effectRef idx="2">
+            <a:schemeClr val="accent1"/>
+          </a:effectRef>
+          <a:fontRef idx="minor">
+            <a:schemeClr val="lt1"/>
+          </a:fontRef>
+        </p:style>
+        <p:txBody>
+          <a:bodyPr rtlCol="0" anchor="ctr"/>
+          <a:lstStyle/>
+          <a:p>
+            <a:pPr algn="ctr"/>
+          </a:p>
+        </p:txBody>
+      </p:sp>
+      <p:sp>
+        <p:nvSpPr>
+          <p:cNvPr id="9" name="Rectangle 8"/>
+          <p:cNvSpPr/>
+          <p:nvPr/>
+        </p:nvSpPr>
+        <p:spPr>
+          <a:xfrm>
+            <a:off x="4307840" y="1463040"/>
+            <a:ext cx="3740912" cy="36576"/>
+          </a:xfrm>
+          <a:prstGeom prst="rect">
+            <a:avLst/>
+          </a:prstGeom>
+          <a:solidFill>
+            <a:srgbClr val="9C4221"/>
+          </a:solidFill>
+          <a:ln>
+            <a:noFill/>
+          </a:ln>
+        </p:spPr>
+        <p:style>
+          <a:lnRef idx="1">
+            <a:schemeClr val="accent1"/>
+          </a:lnRef>
+          <a:fillRef idx="3">
+            <a:schemeClr val="accent1"/>
+          </a:fillRef>
+          <a:effectRef idx="2">
+            <a:schemeClr val="accent1"/>
+          </a:effectRef>
+          <a:fontRef idx="minor">
+            <a:schemeClr val="lt1"/>
+          </a:fontRef>
+        </p:style>
+        <p:txBody>
+          <a:bodyPr rtlCol="0" anchor="ctr"/>
+          <a:lstStyle/>
+          <a:p>
+            <a:pPr algn="ctr"/>
+          </a:p>
+        </p:txBody>
+      </p:sp>
+      <p:sp>
+        <p:nvSpPr>
+          <p:cNvPr id="10" name="TextBox 9"/>
           <p:cNvSpPr txBox="1"/>
           <p:nvPr/>
         </p:nvSpPr>
         <p:spPr>
           <a:xfrm>
-            <a:off x="731520" y="4206240"/>
-            <a:ext cx="10728655" cy="1828800"/>
+            <a:off x="4445000" y="1691640"/>
+            <a:ext cx="3512312" cy="822960"/>
           </a:xfrm>
           <a:prstGeom prst="rect">
             <a:avLst/>
@@ -4450,14 +5338,505 @@
           <a:noFill/>
         </p:spPr>
         <p:txBody>
-          <a:bodyPr wrap="none">
-            <a:spAutoFit/>
-          </a:bodyPr>
-          <a:lstStyle/>
-          <a:p>
-            <a:r>
-              <a:rPr sz="2000"/>
+          <a:bodyPr wrap="square" lIns="0" rIns="0" tIns="0" bIns="0" anchor="ctr"/>
+          <a:lstStyle/>
+          <a:p>
+            <a:pPr algn="l">
+              <a:lnSpc>
+                <a:spcPct val="100000"/>
+              </a:lnSpc>
+              <a:spcBef>
+                <a:spcPts val="0"/>
+              </a:spcBef>
+              <a:spcAft>
+                <a:spcPts val="0"/>
+              </a:spcAft>
+            </a:pPr>
+            <a:r>
+              <a:rPr sz="4000" b="1">
+                <a:solidFill>
+                  <a:srgbClr val="1C1915"/>
+                </a:solidFill>
+                <a:latin typeface="Georgia"/>
+              </a:rPr>
+              <a:t>99.8%</a:t>
+            </a:r>
+          </a:p>
+        </p:txBody>
+      </p:sp>
+      <p:sp>
+        <p:nvSpPr>
+          <p:cNvPr id="11" name="TextBox 10"/>
+          <p:cNvSpPr txBox="1"/>
+          <p:nvPr/>
+        </p:nvSpPr>
+        <p:spPr>
+          <a:xfrm>
+            <a:off x="4445000" y="2560320"/>
+            <a:ext cx="3512312" cy="640080"/>
+          </a:xfrm>
+          <a:prstGeom prst="rect">
+            <a:avLst/>
+          </a:prstGeom>
+          <a:noFill/>
+        </p:spPr>
+        <p:txBody>
+          <a:bodyPr wrap="square" lIns="0" rIns="0" tIns="0" bIns="0" anchor="t"/>
+          <a:lstStyle/>
+          <a:p>
+            <a:pPr algn="l">
+              <a:lnSpc>
+                <a:spcPct val="100000"/>
+              </a:lnSpc>
+              <a:spcBef>
+                <a:spcPts val="0"/>
+              </a:spcBef>
+              <a:spcAft>
+                <a:spcPts val="0"/>
+              </a:spcAft>
+            </a:pPr>
+            <a:r>
+              <a:rPr sz="1400" b="0">
+                <a:solidFill>
+                  <a:srgbClr val="5C564C"/>
+                </a:solidFill>
+                <a:latin typeface="Calibri"/>
+              </a:rPr>
+              <a:t>Monthly NRR (weighted)</a:t>
+            </a:r>
+          </a:p>
+        </p:txBody>
+      </p:sp>
+      <p:sp>
+        <p:nvSpPr>
+          <p:cNvPr id="12" name="Rounded Rectangle 11"/>
+          <p:cNvSpPr/>
+          <p:nvPr/>
+        </p:nvSpPr>
+        <p:spPr>
+          <a:xfrm>
+            <a:off x="8048752" y="1463040"/>
+            <a:ext cx="3576320" cy="2057400"/>
+          </a:xfrm>
+          <a:prstGeom prst="roundRect">
+            <a:avLst>
+              <a:gd name="adj" fmla="val 8000"/>
+            </a:avLst>
+          </a:prstGeom>
+          <a:solidFill>
+            <a:srgbClr val="FBF9F5"/>
+          </a:solidFill>
+          <a:ln>
+            <a:noFill/>
+          </a:ln>
+        </p:spPr>
+        <p:style>
+          <a:lnRef idx="1">
+            <a:schemeClr val="accent1"/>
+          </a:lnRef>
+          <a:fillRef idx="3">
+            <a:schemeClr val="accent1"/>
+          </a:fillRef>
+          <a:effectRef idx="2">
+            <a:schemeClr val="accent1"/>
+          </a:effectRef>
+          <a:fontRef idx="minor">
+            <a:schemeClr val="lt1"/>
+          </a:fontRef>
+        </p:style>
+        <p:txBody>
+          <a:bodyPr rtlCol="0" anchor="ctr"/>
+          <a:lstStyle/>
+          <a:p>
+            <a:pPr algn="ctr"/>
+          </a:p>
+        </p:txBody>
+      </p:sp>
+      <p:sp>
+        <p:nvSpPr>
+          <p:cNvPr id="13" name="Rectangle 12"/>
+          <p:cNvSpPr/>
+          <p:nvPr/>
+        </p:nvSpPr>
+        <p:spPr>
+          <a:xfrm>
+            <a:off x="8048752" y="1463040"/>
+            <a:ext cx="3576320" cy="36576"/>
+          </a:xfrm>
+          <a:prstGeom prst="rect">
+            <a:avLst/>
+          </a:prstGeom>
+          <a:solidFill>
+            <a:srgbClr val="9C4221"/>
+          </a:solidFill>
+          <a:ln>
+            <a:noFill/>
+          </a:ln>
+        </p:spPr>
+        <p:style>
+          <a:lnRef idx="1">
+            <a:schemeClr val="accent1"/>
+          </a:lnRef>
+          <a:fillRef idx="3">
+            <a:schemeClr val="accent1"/>
+          </a:fillRef>
+          <a:effectRef idx="2">
+            <a:schemeClr val="accent1"/>
+          </a:effectRef>
+          <a:fontRef idx="minor">
+            <a:schemeClr val="lt1"/>
+          </a:fontRef>
+        </p:style>
+        <p:txBody>
+          <a:bodyPr rtlCol="0" anchor="ctr"/>
+          <a:lstStyle/>
+          <a:p>
+            <a:pPr algn="ctr"/>
+          </a:p>
+        </p:txBody>
+      </p:sp>
+      <p:sp>
+        <p:nvSpPr>
+          <p:cNvPr id="14" name="TextBox 13"/>
+          <p:cNvSpPr txBox="1"/>
+          <p:nvPr/>
+        </p:nvSpPr>
+        <p:spPr>
+          <a:xfrm>
+            <a:off x="8185912" y="1691640"/>
+            <a:ext cx="3347720" cy="822960"/>
+          </a:xfrm>
+          <a:prstGeom prst="rect">
+            <a:avLst/>
+          </a:prstGeom>
+          <a:noFill/>
+        </p:spPr>
+        <p:txBody>
+          <a:bodyPr wrap="square" lIns="0" rIns="0" tIns="0" bIns="0" anchor="ctr"/>
+          <a:lstStyle/>
+          <a:p>
+            <a:pPr algn="l">
+              <a:lnSpc>
+                <a:spcPct val="100000"/>
+              </a:lnSpc>
+              <a:spcBef>
+                <a:spcPts val="0"/>
+              </a:spcBef>
+              <a:spcAft>
+                <a:spcPts val="0"/>
+              </a:spcAft>
+            </a:pPr>
+            <a:r>
+              <a:rPr sz="4000" b="1">
+                <a:solidFill>
+                  <a:srgbClr val="1C1915"/>
+                </a:solidFill>
+                <a:latin typeface="Georgia"/>
+              </a:rPr>
+              <a:t>6,172</a:t>
+            </a:r>
+          </a:p>
+        </p:txBody>
+      </p:sp>
+      <p:sp>
+        <p:nvSpPr>
+          <p:cNvPr id="15" name="TextBox 14"/>
+          <p:cNvSpPr txBox="1"/>
+          <p:nvPr/>
+        </p:nvSpPr>
+        <p:spPr>
+          <a:xfrm>
+            <a:off x="8185912" y="2560320"/>
+            <a:ext cx="3347720" cy="640080"/>
+          </a:xfrm>
+          <a:prstGeom prst="rect">
+            <a:avLst/>
+          </a:prstGeom>
+          <a:noFill/>
+        </p:spPr>
+        <p:txBody>
+          <a:bodyPr wrap="square" lIns="0" rIns="0" tIns="0" bIns="0" anchor="t"/>
+          <a:lstStyle/>
+          <a:p>
+            <a:pPr algn="l">
+              <a:lnSpc>
+                <a:spcPct val="100000"/>
+              </a:lnSpc>
+              <a:spcBef>
+                <a:spcPts val="0"/>
+              </a:spcBef>
+              <a:spcAft>
+                <a:spcPts val="0"/>
+              </a:spcAft>
+            </a:pPr>
+            <a:r>
+              <a:rPr sz="1400" b="0">
+                <a:solidFill>
+                  <a:srgbClr val="5C564C"/>
+                </a:solidFill>
+                <a:latin typeface="Calibri"/>
+              </a:rPr>
+              <a:t>Active subscriptions</a:t>
+            </a:r>
+          </a:p>
+        </p:txBody>
+      </p:sp>
+      <p:sp>
+        <p:nvSpPr>
+          <p:cNvPr id="16" name="Rounded Rectangle 15"/>
+          <p:cNvSpPr/>
+          <p:nvPr/>
+        </p:nvSpPr>
+        <p:spPr>
+          <a:xfrm>
+            <a:off x="566928" y="3794760"/>
+            <a:ext cx="11058144" cy="1188720"/>
+          </a:xfrm>
+          <a:prstGeom prst="roundRect">
+            <a:avLst>
+              <a:gd name="adj" fmla="val 8000"/>
+            </a:avLst>
+          </a:prstGeom>
+          <a:solidFill>
+            <a:srgbClr val="FBF9F5"/>
+          </a:solidFill>
+          <a:ln>
+            <a:noFill/>
+          </a:ln>
+        </p:spPr>
+        <p:style>
+          <a:lnRef idx="1">
+            <a:schemeClr val="accent1"/>
+          </a:lnRef>
+          <a:fillRef idx="3">
+            <a:schemeClr val="accent1"/>
+          </a:fillRef>
+          <a:effectRef idx="2">
+            <a:schemeClr val="accent1"/>
+          </a:effectRef>
+          <a:fontRef idx="minor">
+            <a:schemeClr val="lt1"/>
+          </a:fontRef>
+        </p:style>
+        <p:txBody>
+          <a:bodyPr rtlCol="0" anchor="ctr"/>
+          <a:lstStyle/>
+          <a:p>
+            <a:pPr algn="ctr"/>
+          </a:p>
+        </p:txBody>
+      </p:sp>
+      <p:sp>
+        <p:nvSpPr>
+          <p:cNvPr id="17" name="Rectangle 16"/>
+          <p:cNvSpPr/>
+          <p:nvPr/>
+        </p:nvSpPr>
+        <p:spPr>
+          <a:xfrm>
+            <a:off x="566928" y="3794760"/>
+            <a:ext cx="54864" cy="1188720"/>
+          </a:xfrm>
+          <a:prstGeom prst="rect">
+            <a:avLst/>
+          </a:prstGeom>
+          <a:solidFill>
+            <a:srgbClr val="9C4221"/>
+          </a:solidFill>
+          <a:ln>
+            <a:noFill/>
+          </a:ln>
+        </p:spPr>
+        <p:style>
+          <a:lnRef idx="1">
+            <a:schemeClr val="accent1"/>
+          </a:lnRef>
+          <a:fillRef idx="3">
+            <a:schemeClr val="accent1"/>
+          </a:fillRef>
+          <a:effectRef idx="2">
+            <a:schemeClr val="accent1"/>
+          </a:effectRef>
+          <a:fontRef idx="minor">
+            <a:schemeClr val="lt1"/>
+          </a:fontRef>
+        </p:style>
+        <p:txBody>
+          <a:bodyPr rtlCol="0" anchor="ctr"/>
+          <a:lstStyle/>
+          <a:p>
+            <a:pPr algn="ctr"/>
+          </a:p>
+        </p:txBody>
+      </p:sp>
+      <p:sp>
+        <p:nvSpPr>
+          <p:cNvPr id="18" name="TextBox 17"/>
+          <p:cNvSpPr txBox="1"/>
+          <p:nvPr/>
+        </p:nvSpPr>
+        <p:spPr>
+          <a:xfrm>
+            <a:off x="841248" y="3886200"/>
+            <a:ext cx="10646664" cy="1005840"/>
+          </a:xfrm>
+          <a:prstGeom prst="rect">
+            <a:avLst/>
+          </a:prstGeom>
+          <a:noFill/>
+        </p:spPr>
+        <p:txBody>
+          <a:bodyPr wrap="square" lIns="0" rIns="0" tIns="0" bIns="0" anchor="ctr"/>
+          <a:lstStyle/>
+          <a:p>
+            <a:pPr algn="l">
+              <a:lnSpc>
+                <a:spcPct val="100000"/>
+              </a:lnSpc>
+              <a:spcBef>
+                <a:spcPts val="0"/>
+              </a:spcBef>
+              <a:spcAft>
+                <a:spcPts val="0"/>
+              </a:spcAft>
+            </a:pPr>
+            <a:r>
+              <a:rPr sz="1600" b="0">
+                <a:solidFill>
+                  <a:srgbClr val="1C1915"/>
+                </a:solidFill>
+                <a:latin typeface="Calibri"/>
+              </a:rPr>
               <a:t>Weighted monthly churn was 2.4% over the review period</a:t>
+            </a:r>
+          </a:p>
+        </p:txBody>
+      </p:sp>
+      <p:sp>
+        <p:nvSpPr>
+          <p:cNvPr id="19" name="Rectangle 18"/>
+          <p:cNvSpPr/>
+          <p:nvPr/>
+        </p:nvSpPr>
+        <p:spPr>
+          <a:xfrm>
+            <a:off x="566928" y="6437376"/>
+            <a:ext cx="11058144" cy="9144"/>
+          </a:xfrm>
+          <a:prstGeom prst="rect">
+            <a:avLst/>
+          </a:prstGeom>
+          <a:solidFill>
+            <a:srgbClr val="E3DCD0"/>
+          </a:solidFill>
+          <a:ln>
+            <a:noFill/>
+          </a:ln>
+        </p:spPr>
+        <p:style>
+          <a:lnRef idx="1">
+            <a:schemeClr val="accent1"/>
+          </a:lnRef>
+          <a:fillRef idx="3">
+            <a:schemeClr val="accent1"/>
+          </a:fillRef>
+          <a:effectRef idx="2">
+            <a:schemeClr val="accent1"/>
+          </a:effectRef>
+          <a:fontRef idx="minor">
+            <a:schemeClr val="lt1"/>
+          </a:fontRef>
+        </p:style>
+        <p:txBody>
+          <a:bodyPr rtlCol="0" anchor="ctr"/>
+          <a:lstStyle/>
+          <a:p>
+            <a:pPr algn="ctr"/>
+          </a:p>
+        </p:txBody>
+      </p:sp>
+      <p:sp>
+        <p:nvSpPr>
+          <p:cNvPr id="20" name="TextBox 19"/>
+          <p:cNvSpPr txBox="1"/>
+          <p:nvPr/>
+        </p:nvSpPr>
+        <p:spPr>
+          <a:xfrm>
+            <a:off x="566928" y="6501384"/>
+            <a:ext cx="10253472" cy="274320"/>
+          </a:xfrm>
+          <a:prstGeom prst="rect">
+            <a:avLst/>
+          </a:prstGeom>
+          <a:noFill/>
+        </p:spPr>
+        <p:txBody>
+          <a:bodyPr wrap="square" lIns="0" rIns="0" tIns="0" bIns="0" anchor="ctr"/>
+          <a:lstStyle/>
+          <a:p>
+            <a:pPr algn="l">
+              <a:lnSpc>
+                <a:spcPct val="100000"/>
+              </a:lnSpc>
+              <a:spcBef>
+                <a:spcPts val="0"/>
+              </a:spcBef>
+              <a:spcAft>
+                <a:spcPts val="0"/>
+              </a:spcAft>
+            </a:pPr>
+            <a:r>
+              <a:rPr sz="1200" b="0">
+                <a:solidFill>
+                  <a:srgbClr val="5C564C"/>
+                </a:solidFill>
+                <a:latin typeface="Calibri"/>
+              </a:rPr>
+              <a:t>Sources   Monthly churn (weighted)   ·   Monthly NRR (weighted)   ·   Active subscriptions</a:t>
+            </a:r>
+          </a:p>
+        </p:txBody>
+      </p:sp>
+      <p:sp>
+        <p:nvSpPr>
+          <p:cNvPr id="21" name="TextBox 20"/>
+          <p:cNvSpPr txBox="1"/>
+          <p:nvPr/>
+        </p:nvSpPr>
+        <p:spPr>
+          <a:xfrm>
+            <a:off x="10984992" y="6483096"/>
+            <a:ext cx="640080" cy="292608"/>
+          </a:xfrm>
+          <a:prstGeom prst="rect">
+            <a:avLst/>
+          </a:prstGeom>
+          <a:noFill/>
+        </p:spPr>
+        <p:txBody>
+          <a:bodyPr wrap="square" lIns="0" rIns="0" tIns="0" bIns="0" anchor="ctr"/>
+          <a:lstStyle/>
+          <a:p>
+            <a:pPr algn="r">
+              <a:lnSpc>
+                <a:spcPct val="100000"/>
+              </a:lnSpc>
+              <a:spcBef>
+                <a:spcPts val="0"/>
+              </a:spcBef>
+              <a:spcAft>
+                <a:spcPts val="0"/>
+              </a:spcAft>
+            </a:pPr>
+            <a:r>
+              <a:rPr sz="1300" b="0">
+                <a:solidFill>
+                  <a:srgbClr val="1C1915"/>
+                </a:solidFill>
+                <a:latin typeface="Georgia"/>
+              </a:rPr>
+              <a:t>II</a:t>
             </a:r>
           </a:p>
         </p:txBody>
@@ -4473,6 +5852,14 @@
 <file path=ppt/slides/slide3.xml><?xml version="1.0" encoding="utf-8"?>
 <p:sld xmlns:a="http://schemas.openxmlformats.org/drawingml/2006/main" xmlns:p="http://schemas.openxmlformats.org/presentationml/2006/main" xmlns:r="http://schemas.openxmlformats.org/officeDocument/2006/relationships">
   <p:cSld>
+    <p:bg>
+      <p:bgPr>
+        <a:solidFill>
+          <a:srgbClr val="F4F0E8"/>
+        </a:solidFill>
+        <a:effectLst/>
+      </p:bgPr>
+    </p:bg>
     <p:spTree>
       <p:nvGrpSpPr>
         <p:cNvPr id="1" name=""/>
@@ -4482,36 +5869,146 @@
       <p:grpSpPr/>
       <p:sp>
         <p:nvSpPr>
-          <p:cNvPr id="2" name="Title 1"/>
-          <p:cNvSpPr>
-            <a:spLocks noGrp="1"/>
-          </p:cNvSpPr>
-          <p:nvPr>
-            <p:ph type="title"/>
-          </p:nvPr>
-        </p:nvSpPr>
-        <p:spPr/>
-        <p:txBody>
-          <a:bodyPr/>
-          <a:lstStyle/>
-          <a:p>
-            <a:r>
-              <a:t>Monthly churn trend</a:t>
-            </a:r>
+          <p:cNvPr id="2" name="TextBox 1"/>
+          <p:cNvSpPr txBox="1"/>
+          <p:nvPr/>
+        </p:nvSpPr>
+        <p:spPr>
+          <a:xfrm>
+            <a:off x="566928" y="347472"/>
+            <a:ext cx="11058144" cy="841248"/>
+          </a:xfrm>
+          <a:prstGeom prst="rect">
+            <a:avLst/>
+          </a:prstGeom>
+          <a:noFill/>
+        </p:spPr>
+        <p:txBody>
+          <a:bodyPr wrap="square" lIns="0" rIns="0" tIns="0" bIns="0" anchor="b"/>
+          <a:lstStyle/>
+          <a:p>
+            <a:pPr algn="l">
+              <a:lnSpc>
+                <a:spcPct val="100000"/>
+              </a:lnSpc>
+              <a:spcBef>
+                <a:spcPts val="0"/>
+              </a:spcBef>
+              <a:spcAft>
+                <a:spcPts val="0"/>
+              </a:spcAft>
+            </a:pPr>
+            <a:r>
+              <a:rPr sz="2800" b="0">
+                <a:solidFill>
+                  <a:srgbClr val="1C1915"/>
+                </a:solidFill>
+                <a:latin typeface="Georgia"/>
+              </a:rPr>
+              <a:t>Monthly churn ended lower than it started</a:t>
+            </a:r>
+          </a:p>
+        </p:txBody>
+      </p:sp>
+      <p:sp>
+        <p:nvSpPr>
+          <p:cNvPr id="3" name="Rectangle 2"/>
+          <p:cNvSpPr/>
+          <p:nvPr/>
+        </p:nvSpPr>
+        <p:spPr>
+          <a:xfrm>
+            <a:off x="566928" y="1234440"/>
+            <a:ext cx="365760" cy="27432"/>
+          </a:xfrm>
+          <a:prstGeom prst="rect">
+            <a:avLst/>
+          </a:prstGeom>
+          <a:solidFill>
+            <a:srgbClr val="9C4221"/>
+          </a:solidFill>
+          <a:ln>
+            <a:noFill/>
+          </a:ln>
+        </p:spPr>
+        <p:style>
+          <a:lnRef idx="1">
+            <a:schemeClr val="accent1"/>
+          </a:lnRef>
+          <a:fillRef idx="3">
+            <a:schemeClr val="accent1"/>
+          </a:fillRef>
+          <a:effectRef idx="2">
+            <a:schemeClr val="accent1"/>
+          </a:effectRef>
+          <a:fontRef idx="minor">
+            <a:schemeClr val="lt1"/>
+          </a:fontRef>
+        </p:style>
+        <p:txBody>
+          <a:bodyPr rtlCol="0" anchor="ctr"/>
+          <a:lstStyle/>
+          <a:p>
+            <a:pPr algn="ctr"/>
+          </a:p>
+        </p:txBody>
+      </p:sp>
+      <p:sp>
+        <p:nvSpPr>
+          <p:cNvPr id="4" name="Rounded Rectangle 3"/>
+          <p:cNvSpPr/>
+          <p:nvPr/>
+        </p:nvSpPr>
+        <p:spPr>
+          <a:xfrm>
+            <a:off x="566928" y="1554480"/>
+            <a:ext cx="11058144" cy="4791456"/>
+          </a:xfrm>
+          <a:prstGeom prst="roundRect">
+            <a:avLst>
+              <a:gd name="adj" fmla="val 4000"/>
+            </a:avLst>
+          </a:prstGeom>
+          <a:solidFill>
+            <a:srgbClr val="FBF9F5"/>
+          </a:solidFill>
+          <a:ln>
+            <a:noFill/>
+          </a:ln>
+        </p:spPr>
+        <p:style>
+          <a:lnRef idx="1">
+            <a:schemeClr val="accent1"/>
+          </a:lnRef>
+          <a:fillRef idx="3">
+            <a:schemeClr val="accent1"/>
+          </a:fillRef>
+          <a:effectRef idx="2">
+            <a:schemeClr val="accent1"/>
+          </a:effectRef>
+          <a:fontRef idx="minor">
+            <a:schemeClr val="lt1"/>
+          </a:fontRef>
+        </p:style>
+        <p:txBody>
+          <a:bodyPr rtlCol="0" anchor="ctr"/>
+          <a:lstStyle/>
+          <a:p>
+            <a:pPr algn="ctr"/>
           </a:p>
         </p:txBody>
       </p:sp>
       <p:graphicFrame>
         <p:nvGraphicFramePr>
-          <p:cNvPr id="3" name="Chart 2"/>
+          <p:cNvPr id="5" name="Chart 4"/>
           <p:cNvGraphicFramePr>
             <a:graphicFrameLocks noGrp="1"/>
           </p:cNvGraphicFramePr>
           <p:nvPr/>
         </p:nvGraphicFramePr>
         <p:xfrm>
-          <a:off x="731520" y="1463040"/>
-          <a:ext cx="10728655" cy="4754880"/>
+          <a:off x="704088" y="1691640"/>
+          <a:ext cx="10783824" cy="4517136"/>
         </p:xfrm>
         <a:graphic>
           <a:graphicData uri="http://schemas.openxmlformats.org/drawingml/2006/chart">
@@ -4519,6 +6016,135 @@
           </a:graphicData>
         </a:graphic>
       </p:graphicFrame>
+      <p:sp>
+        <p:nvSpPr>
+          <p:cNvPr id="6" name="Rectangle 5"/>
+          <p:cNvSpPr/>
+          <p:nvPr/>
+        </p:nvSpPr>
+        <p:spPr>
+          <a:xfrm>
+            <a:off x="566928" y="6437376"/>
+            <a:ext cx="11058144" cy="9144"/>
+          </a:xfrm>
+          <a:prstGeom prst="rect">
+            <a:avLst/>
+          </a:prstGeom>
+          <a:solidFill>
+            <a:srgbClr val="E3DCD0"/>
+          </a:solidFill>
+          <a:ln>
+            <a:noFill/>
+          </a:ln>
+        </p:spPr>
+        <p:style>
+          <a:lnRef idx="1">
+            <a:schemeClr val="accent1"/>
+          </a:lnRef>
+          <a:fillRef idx="3">
+            <a:schemeClr val="accent1"/>
+          </a:fillRef>
+          <a:effectRef idx="2">
+            <a:schemeClr val="accent1"/>
+          </a:effectRef>
+          <a:fontRef idx="minor">
+            <a:schemeClr val="lt1"/>
+          </a:fontRef>
+        </p:style>
+        <p:txBody>
+          <a:bodyPr rtlCol="0" anchor="ctr"/>
+          <a:lstStyle/>
+          <a:p>
+            <a:pPr algn="ctr"/>
+          </a:p>
+        </p:txBody>
+      </p:sp>
+      <p:sp>
+        <p:nvSpPr>
+          <p:cNvPr id="7" name="TextBox 6"/>
+          <p:cNvSpPr txBox="1"/>
+          <p:nvPr/>
+        </p:nvSpPr>
+        <p:spPr>
+          <a:xfrm>
+            <a:off x="566928" y="6501384"/>
+            <a:ext cx="10253472" cy="274320"/>
+          </a:xfrm>
+          <a:prstGeom prst="rect">
+            <a:avLst/>
+          </a:prstGeom>
+          <a:noFill/>
+        </p:spPr>
+        <p:txBody>
+          <a:bodyPr wrap="square" lIns="0" rIns="0" tIns="0" bIns="0" anchor="ctr"/>
+          <a:lstStyle/>
+          <a:p>
+            <a:pPr algn="l">
+              <a:lnSpc>
+                <a:spcPct val="100000"/>
+              </a:lnSpc>
+              <a:spcBef>
+                <a:spcPts val="0"/>
+              </a:spcBef>
+              <a:spcAft>
+                <a:spcPts val="0"/>
+              </a:spcAft>
+            </a:pPr>
+            <a:r>
+              <a:rPr sz="1200" b="0">
+                <a:solidFill>
+                  <a:srgbClr val="5C564C"/>
+                </a:solidFill>
+                <a:latin typeface="Calibri"/>
+              </a:rPr>
+              <a:t>Sources   Monthly churn</a:t>
+            </a:r>
+          </a:p>
+        </p:txBody>
+      </p:sp>
+      <p:sp>
+        <p:nvSpPr>
+          <p:cNvPr id="8" name="TextBox 7"/>
+          <p:cNvSpPr txBox="1"/>
+          <p:nvPr/>
+        </p:nvSpPr>
+        <p:spPr>
+          <a:xfrm>
+            <a:off x="10984992" y="6483096"/>
+            <a:ext cx="640080" cy="292608"/>
+          </a:xfrm>
+          <a:prstGeom prst="rect">
+            <a:avLst/>
+          </a:prstGeom>
+          <a:noFill/>
+        </p:spPr>
+        <p:txBody>
+          <a:bodyPr wrap="square" lIns="0" rIns="0" tIns="0" bIns="0" anchor="ctr"/>
+          <a:lstStyle/>
+          <a:p>
+            <a:pPr algn="r">
+              <a:lnSpc>
+                <a:spcPct val="100000"/>
+              </a:lnSpc>
+              <a:spcBef>
+                <a:spcPts val="0"/>
+              </a:spcBef>
+              <a:spcAft>
+                <a:spcPts val="0"/>
+              </a:spcAft>
+            </a:pPr>
+            <a:r>
+              <a:rPr sz="1300" b="0">
+                <a:solidFill>
+                  <a:srgbClr val="1C1915"/>
+                </a:solidFill>
+                <a:latin typeface="Georgia"/>
+              </a:rPr>
+              <a:t>III</a:t>
+            </a:r>
+          </a:p>
+        </p:txBody>
+      </p:sp>
     </p:spTree>
   </p:cSld>
   <p:clrMapOvr>
@@ -4530,6 +6156,14 @@
 <file path=ppt/slides/slide4.xml><?xml version="1.0" encoding="utf-8"?>
 <p:sld xmlns:a="http://schemas.openxmlformats.org/drawingml/2006/main" xmlns:p="http://schemas.openxmlformats.org/presentationml/2006/main" xmlns:r="http://schemas.openxmlformats.org/officeDocument/2006/relationships">
   <p:cSld>
+    <p:bg>
+      <p:bgPr>
+        <a:solidFill>
+          <a:srgbClr val="F4F0E8"/>
+        </a:solidFill>
+        <a:effectLst/>
+      </p:bgPr>
+    </p:bg>
     <p:spTree>
       <p:nvGrpSpPr>
         <p:cNvPr id="1" name=""/>
@@ -4539,36 +6173,146 @@
       <p:grpSpPr/>
       <p:sp>
         <p:nvSpPr>
-          <p:cNvPr id="2" name="Title 1"/>
-          <p:cNvSpPr>
-            <a:spLocks noGrp="1"/>
-          </p:cNvSpPr>
-          <p:nvPr>
-            <p:ph type="title"/>
-          </p:nvPr>
-        </p:nvSpPr>
-        <p:spPr/>
-        <p:txBody>
-          <a:bodyPr/>
-          <a:lstStyle/>
-          <a:p>
-            <a:r>
-              <a:t>Monthly churn by segment</a:t>
-            </a:r>
+          <p:cNvPr id="2" name="TextBox 1"/>
+          <p:cNvSpPr txBox="1"/>
+          <p:nvPr/>
+        </p:nvSpPr>
+        <p:spPr>
+          <a:xfrm>
+            <a:off x="566928" y="347472"/>
+            <a:ext cx="11058144" cy="841248"/>
+          </a:xfrm>
+          <a:prstGeom prst="rect">
+            <a:avLst/>
+          </a:prstGeom>
+          <a:noFill/>
+        </p:spPr>
+        <p:txBody>
+          <a:bodyPr wrap="square" lIns="0" rIns="0" tIns="0" bIns="0" anchor="b"/>
+          <a:lstStyle/>
+          <a:p>
+            <a:pPr algn="l">
+              <a:lnSpc>
+                <a:spcPct val="100000"/>
+              </a:lnSpc>
+              <a:spcBef>
+                <a:spcPts val="0"/>
+              </a:spcBef>
+              <a:spcAft>
+                <a:spcPts val="0"/>
+              </a:spcAft>
+            </a:pPr>
+            <a:r>
+              <a:rPr sz="2800" b="0">
+                <a:solidFill>
+                  <a:srgbClr val="1C1915"/>
+                </a:solidFill>
+                <a:latin typeface="Georgia"/>
+              </a:rPr>
+              <a:t>Churn is highest in SMB</a:t>
+            </a:r>
+          </a:p>
+        </p:txBody>
+      </p:sp>
+      <p:sp>
+        <p:nvSpPr>
+          <p:cNvPr id="3" name="Rectangle 2"/>
+          <p:cNvSpPr/>
+          <p:nvPr/>
+        </p:nvSpPr>
+        <p:spPr>
+          <a:xfrm>
+            <a:off x="566928" y="1234440"/>
+            <a:ext cx="365760" cy="27432"/>
+          </a:xfrm>
+          <a:prstGeom prst="rect">
+            <a:avLst/>
+          </a:prstGeom>
+          <a:solidFill>
+            <a:srgbClr val="9C4221"/>
+          </a:solidFill>
+          <a:ln>
+            <a:noFill/>
+          </a:ln>
+        </p:spPr>
+        <p:style>
+          <a:lnRef idx="1">
+            <a:schemeClr val="accent1"/>
+          </a:lnRef>
+          <a:fillRef idx="3">
+            <a:schemeClr val="accent1"/>
+          </a:fillRef>
+          <a:effectRef idx="2">
+            <a:schemeClr val="accent1"/>
+          </a:effectRef>
+          <a:fontRef idx="minor">
+            <a:schemeClr val="lt1"/>
+          </a:fontRef>
+        </p:style>
+        <p:txBody>
+          <a:bodyPr rtlCol="0" anchor="ctr"/>
+          <a:lstStyle/>
+          <a:p>
+            <a:pPr algn="ctr"/>
+          </a:p>
+        </p:txBody>
+      </p:sp>
+      <p:sp>
+        <p:nvSpPr>
+          <p:cNvPr id="4" name="Rounded Rectangle 3"/>
+          <p:cNvSpPr/>
+          <p:nvPr/>
+        </p:nvSpPr>
+        <p:spPr>
+          <a:xfrm>
+            <a:off x="566928" y="1554480"/>
+            <a:ext cx="11058144" cy="4791456"/>
+          </a:xfrm>
+          <a:prstGeom prst="roundRect">
+            <a:avLst>
+              <a:gd name="adj" fmla="val 4000"/>
+            </a:avLst>
+          </a:prstGeom>
+          <a:solidFill>
+            <a:srgbClr val="FBF9F5"/>
+          </a:solidFill>
+          <a:ln>
+            <a:noFill/>
+          </a:ln>
+        </p:spPr>
+        <p:style>
+          <a:lnRef idx="1">
+            <a:schemeClr val="accent1"/>
+          </a:lnRef>
+          <a:fillRef idx="3">
+            <a:schemeClr val="accent1"/>
+          </a:fillRef>
+          <a:effectRef idx="2">
+            <a:schemeClr val="accent1"/>
+          </a:effectRef>
+          <a:fontRef idx="minor">
+            <a:schemeClr val="lt1"/>
+          </a:fontRef>
+        </p:style>
+        <p:txBody>
+          <a:bodyPr rtlCol="0" anchor="ctr"/>
+          <a:lstStyle/>
+          <a:p>
+            <a:pPr algn="ctr"/>
           </a:p>
         </p:txBody>
       </p:sp>
       <p:graphicFrame>
         <p:nvGraphicFramePr>
-          <p:cNvPr id="3" name="Chart 2"/>
+          <p:cNvPr id="5" name="Chart 4"/>
           <p:cNvGraphicFramePr>
             <a:graphicFrameLocks noGrp="1"/>
           </p:cNvGraphicFramePr>
           <p:nvPr/>
         </p:nvGraphicFramePr>
         <p:xfrm>
-          <a:off x="731520" y="1463040"/>
-          <a:ext cx="10728655" cy="4754880"/>
+          <a:off x="704088" y="1691640"/>
+          <a:ext cx="10783824" cy="4517136"/>
         </p:xfrm>
         <a:graphic>
           <a:graphicData uri="http://schemas.openxmlformats.org/drawingml/2006/chart">
@@ -4576,6 +6320,135 @@
           </a:graphicData>
         </a:graphic>
       </p:graphicFrame>
+      <p:sp>
+        <p:nvSpPr>
+          <p:cNvPr id="6" name="Rectangle 5"/>
+          <p:cNvSpPr/>
+          <p:nvPr/>
+        </p:nvSpPr>
+        <p:spPr>
+          <a:xfrm>
+            <a:off x="566928" y="6437376"/>
+            <a:ext cx="11058144" cy="9144"/>
+          </a:xfrm>
+          <a:prstGeom prst="rect">
+            <a:avLst/>
+          </a:prstGeom>
+          <a:solidFill>
+            <a:srgbClr val="E3DCD0"/>
+          </a:solidFill>
+          <a:ln>
+            <a:noFill/>
+          </a:ln>
+        </p:spPr>
+        <p:style>
+          <a:lnRef idx="1">
+            <a:schemeClr val="accent1"/>
+          </a:lnRef>
+          <a:fillRef idx="3">
+            <a:schemeClr val="accent1"/>
+          </a:fillRef>
+          <a:effectRef idx="2">
+            <a:schemeClr val="accent1"/>
+          </a:effectRef>
+          <a:fontRef idx="minor">
+            <a:schemeClr val="lt1"/>
+          </a:fontRef>
+        </p:style>
+        <p:txBody>
+          <a:bodyPr rtlCol="0" anchor="ctr"/>
+          <a:lstStyle/>
+          <a:p>
+            <a:pPr algn="ctr"/>
+          </a:p>
+        </p:txBody>
+      </p:sp>
+      <p:sp>
+        <p:nvSpPr>
+          <p:cNvPr id="7" name="TextBox 6"/>
+          <p:cNvSpPr txBox="1"/>
+          <p:nvPr/>
+        </p:nvSpPr>
+        <p:spPr>
+          <a:xfrm>
+            <a:off x="566928" y="6501384"/>
+            <a:ext cx="10253472" cy="274320"/>
+          </a:xfrm>
+          <a:prstGeom prst="rect">
+            <a:avLst/>
+          </a:prstGeom>
+          <a:noFill/>
+        </p:spPr>
+        <p:txBody>
+          <a:bodyPr wrap="square" lIns="0" rIns="0" tIns="0" bIns="0" anchor="ctr"/>
+          <a:lstStyle/>
+          <a:p>
+            <a:pPr algn="l">
+              <a:lnSpc>
+                <a:spcPct val="100000"/>
+              </a:lnSpc>
+              <a:spcBef>
+                <a:spcPts val="0"/>
+              </a:spcBef>
+              <a:spcAft>
+                <a:spcPts val="0"/>
+              </a:spcAft>
+            </a:pPr>
+            <a:r>
+              <a:rPr sz="1200" b="0">
+                <a:solidFill>
+                  <a:srgbClr val="5C564C"/>
+                </a:solidFill>
+                <a:latin typeface="Calibri"/>
+              </a:rPr>
+              <a:t>Sources   Weighted monthly churn by segment</a:t>
+            </a:r>
+          </a:p>
+        </p:txBody>
+      </p:sp>
+      <p:sp>
+        <p:nvSpPr>
+          <p:cNvPr id="8" name="TextBox 7"/>
+          <p:cNvSpPr txBox="1"/>
+          <p:nvPr/>
+        </p:nvSpPr>
+        <p:spPr>
+          <a:xfrm>
+            <a:off x="10984992" y="6483096"/>
+            <a:ext cx="640080" cy="292608"/>
+          </a:xfrm>
+          <a:prstGeom prst="rect">
+            <a:avLst/>
+          </a:prstGeom>
+          <a:noFill/>
+        </p:spPr>
+        <p:txBody>
+          <a:bodyPr wrap="square" lIns="0" rIns="0" tIns="0" bIns="0" anchor="ctr"/>
+          <a:lstStyle/>
+          <a:p>
+            <a:pPr algn="r">
+              <a:lnSpc>
+                <a:spcPct val="100000"/>
+              </a:lnSpc>
+              <a:spcBef>
+                <a:spcPts val="0"/>
+              </a:spcBef>
+              <a:spcAft>
+                <a:spcPts val="0"/>
+              </a:spcAft>
+            </a:pPr>
+            <a:r>
+              <a:rPr sz="1300" b="0">
+                <a:solidFill>
+                  <a:srgbClr val="1C1915"/>
+                </a:solidFill>
+                <a:latin typeface="Georgia"/>
+              </a:rPr>
+              <a:t>IV</a:t>
+            </a:r>
+          </a:p>
+        </p:txBody>
+      </p:sp>
     </p:spTree>
   </p:cSld>
   <p:clrMapOvr>
@@ -4587,6 +6460,14 @@
 <file path=ppt/slides/slide5.xml><?xml version="1.0" encoding="utf-8"?>
 <p:sld xmlns:a="http://schemas.openxmlformats.org/drawingml/2006/main" xmlns:p="http://schemas.openxmlformats.org/presentationml/2006/main" xmlns:r="http://schemas.openxmlformats.org/officeDocument/2006/relationships">
   <p:cSld>
+    <p:bg>
+      <p:bgPr>
+        <a:solidFill>
+          <a:srgbClr val="F4F0E8"/>
+        </a:solidFill>
+        <a:effectLst/>
+      </p:bgPr>
+    </p:bg>
     <p:spTree>
       <p:nvGrpSpPr>
         <p:cNvPr id="1" name=""/>
@@ -4596,20 +6477,42 @@
       <p:grpSpPr/>
       <p:sp>
         <p:nvSpPr>
-          <p:cNvPr id="2" name="Title 1"/>
-          <p:cNvSpPr>
-            <a:spLocks noGrp="1"/>
-          </p:cNvSpPr>
-          <p:nvPr>
-            <p:ph type="title"/>
-          </p:nvPr>
-        </p:nvSpPr>
-        <p:spPr/>
-        <p:txBody>
-          <a:bodyPr/>
-          <a:lstStyle/>
-          <a:p>
-            <a:r>
+          <p:cNvPr id="2" name="TextBox 1"/>
+          <p:cNvSpPr txBox="1"/>
+          <p:nvPr/>
+        </p:nvSpPr>
+        <p:spPr>
+          <a:xfrm>
+            <a:off x="566928" y="347472"/>
+            <a:ext cx="11058144" cy="841248"/>
+          </a:xfrm>
+          <a:prstGeom prst="rect">
+            <a:avLst/>
+          </a:prstGeom>
+          <a:noFill/>
+        </p:spPr>
+        <p:txBody>
+          <a:bodyPr wrap="square" lIns="0" rIns="0" tIns="0" bIns="0" anchor="b"/>
+          <a:lstStyle/>
+          <a:p>
+            <a:pPr algn="l">
+              <a:lnSpc>
+                <a:spcPct val="100000"/>
+              </a:lnSpc>
+              <a:spcBef>
+                <a:spcPts val="0"/>
+              </a:spcBef>
+              <a:spcAft>
+                <a:spcPts val="0"/>
+              </a:spcAft>
+            </a:pPr>
+            <a:r>
+              <a:rPr sz="2800" b="0">
+                <a:solidFill>
+                  <a:srgbClr val="1C1915"/>
+                </a:solidFill>
+                <a:latin typeface="Georgia"/>
+              </a:rPr>
               <a:t>Sources</a:t>
             </a:r>
           </a:p>
@@ -4617,46 +6520,989 @@
       </p:sp>
       <p:sp>
         <p:nvSpPr>
-          <p:cNvPr id="3" name="Content Placeholder 2"/>
-          <p:cNvSpPr>
-            <a:spLocks noGrp="1"/>
-          </p:cNvSpPr>
-          <p:nvPr>
-            <p:ph idx="1"/>
-          </p:nvPr>
-        </p:nvSpPr>
-        <p:spPr/>
-        <p:txBody>
-          <a:bodyPr/>
-          <a:lstStyle/>
-          <a:p>
-            <a:r>
-              <a:rPr sz="1400"/>
-              <a:t>f1 · Monthly churn (weighted) · churn_rate_quarter · main.cs.churn_monthly · statement duckdb-eed72c8e07d1 · queried 2026-10-18 04:18 UTC</a:t>
-            </a:r>
-          </a:p>
-          <a:p>
-            <a:r>
-              <a:rPr sz="1400"/>
-              <a:t>f2 · Monthly NRR (weighted) · nrr_quarter · main.cs.revenue_monthly · statement duckdb-5075d99a6ed2 · queried 2026-10-18 04:18 UTC</a:t>
-            </a:r>
-          </a:p>
-          <a:p>
-            <a:r>
-              <a:rPr sz="1400"/>
-              <a:t>f3 · Active subscriptions · active_subscriptions · main.cs.churn_monthly · statement duckdb-f73e339fbd2f · queried 2026-10-18 04:18 UTC</a:t>
-            </a:r>
-          </a:p>
-          <a:p>
-            <a:r>
-              <a:rPr sz="1400"/>
-              <a:t>f4 · Monthly churn · churn_trend_monthly · main.cs.churn_monthly · statement duckdb-652fcac2b08a · queried 2026-10-18 04:18 UTC</a:t>
-            </a:r>
-          </a:p>
-          <a:p>
-            <a:r>
-              <a:rPr sz="1400"/>
-              <a:t>f5 · Weighted monthly churn by segment · churn_by_segment · main.cs.churn_monthly · statement duckdb-f610159e247c · queried 2026-10-18 04:18 UTC</a:t>
+          <p:cNvPr id="3" name="Rectangle 2"/>
+          <p:cNvSpPr/>
+          <p:nvPr/>
+        </p:nvSpPr>
+        <p:spPr>
+          <a:xfrm>
+            <a:off x="566928" y="1234440"/>
+            <a:ext cx="365760" cy="27432"/>
+          </a:xfrm>
+          <a:prstGeom prst="rect">
+            <a:avLst/>
+          </a:prstGeom>
+          <a:solidFill>
+            <a:srgbClr val="9C4221"/>
+          </a:solidFill>
+          <a:ln>
+            <a:noFill/>
+          </a:ln>
+        </p:spPr>
+        <p:style>
+          <a:lnRef idx="1">
+            <a:schemeClr val="accent1"/>
+          </a:lnRef>
+          <a:fillRef idx="3">
+            <a:schemeClr val="accent1"/>
+          </a:fillRef>
+          <a:effectRef idx="2">
+            <a:schemeClr val="accent1"/>
+          </a:effectRef>
+          <a:fontRef idx="minor">
+            <a:schemeClr val="lt1"/>
+          </a:fontRef>
+        </p:style>
+        <p:txBody>
+          <a:bodyPr rtlCol="0" anchor="ctr"/>
+          <a:lstStyle/>
+          <a:p>
+            <a:pPr algn="ctr"/>
+          </a:p>
+        </p:txBody>
+      </p:sp>
+      <p:sp>
+        <p:nvSpPr>
+          <p:cNvPr id="4" name="Rectangle 3"/>
+          <p:cNvSpPr/>
+          <p:nvPr/>
+        </p:nvSpPr>
+        <p:spPr>
+          <a:xfrm>
+            <a:off x="566928" y="2322576"/>
+            <a:ext cx="11058144" cy="9144"/>
+          </a:xfrm>
+          <a:prstGeom prst="rect">
+            <a:avLst/>
+          </a:prstGeom>
+          <a:solidFill>
+            <a:srgbClr val="E3DCD0"/>
+          </a:solidFill>
+          <a:ln>
+            <a:noFill/>
+          </a:ln>
+        </p:spPr>
+        <p:style>
+          <a:lnRef idx="1">
+            <a:schemeClr val="accent1"/>
+          </a:lnRef>
+          <a:fillRef idx="3">
+            <a:schemeClr val="accent1"/>
+          </a:fillRef>
+          <a:effectRef idx="2">
+            <a:schemeClr val="accent1"/>
+          </a:effectRef>
+          <a:fontRef idx="minor">
+            <a:schemeClr val="lt1"/>
+          </a:fontRef>
+        </p:style>
+        <p:txBody>
+          <a:bodyPr rtlCol="0" anchor="ctr"/>
+          <a:lstStyle/>
+          <a:p>
+            <a:pPr algn="ctr"/>
+          </a:p>
+        </p:txBody>
+      </p:sp>
+      <p:sp>
+        <p:nvSpPr>
+          <p:cNvPr id="5" name="TextBox 4"/>
+          <p:cNvSpPr txBox="1"/>
+          <p:nvPr/>
+        </p:nvSpPr>
+        <p:spPr>
+          <a:xfrm>
+            <a:off x="566928" y="1600200"/>
+            <a:ext cx="914400" cy="704088"/>
+          </a:xfrm>
+          <a:prstGeom prst="rect">
+            <a:avLst/>
+          </a:prstGeom>
+          <a:noFill/>
+        </p:spPr>
+        <p:txBody>
+          <a:bodyPr wrap="square" lIns="0" rIns="0" tIns="0" bIns="0" anchor="ctr"/>
+          <a:lstStyle/>
+          <a:p>
+            <a:pPr algn="l">
+              <a:lnSpc>
+                <a:spcPct val="100000"/>
+              </a:lnSpc>
+              <a:spcBef>
+                <a:spcPts val="0"/>
+              </a:spcBef>
+              <a:spcAft>
+                <a:spcPts val="0"/>
+              </a:spcAft>
+            </a:pPr>
+            <a:r>
+              <a:rPr sz="1500" b="0">
+                <a:solidFill>
+                  <a:srgbClr val="9C4221"/>
+                </a:solidFill>
+                <a:latin typeface="Georgia"/>
+              </a:rPr>
+              <a:t>f1 ·</a:t>
+            </a:r>
+          </a:p>
+        </p:txBody>
+      </p:sp>
+      <p:sp>
+        <p:nvSpPr>
+          <p:cNvPr id="6" name="TextBox 5"/>
+          <p:cNvSpPr txBox="1"/>
+          <p:nvPr/>
+        </p:nvSpPr>
+        <p:spPr>
+          <a:xfrm>
+            <a:off x="1572768" y="1600200"/>
+            <a:ext cx="3980931" cy="704088"/>
+          </a:xfrm>
+          <a:prstGeom prst="rect">
+            <a:avLst/>
+          </a:prstGeom>
+          <a:noFill/>
+        </p:spPr>
+        <p:txBody>
+          <a:bodyPr wrap="square" lIns="0" rIns="0" tIns="0" bIns="0" anchor="ctr"/>
+          <a:lstStyle/>
+          <a:p>
+            <a:pPr algn="l">
+              <a:lnSpc>
+                <a:spcPct val="100000"/>
+              </a:lnSpc>
+              <a:spcBef>
+                <a:spcPts val="0"/>
+              </a:spcBef>
+              <a:spcAft>
+                <a:spcPts val="0"/>
+              </a:spcAft>
+            </a:pPr>
+            <a:r>
+              <a:rPr sz="1500" b="0">
+                <a:solidFill>
+                  <a:srgbClr val="1C1915"/>
+                </a:solidFill>
+                <a:latin typeface="Calibri"/>
+              </a:rPr>
+              <a:t>Monthly churn (weighted)</a:t>
+            </a:r>
+          </a:p>
+        </p:txBody>
+      </p:sp>
+      <p:sp>
+        <p:nvSpPr>
+          <p:cNvPr id="7" name="TextBox 6"/>
+          <p:cNvSpPr txBox="1"/>
+          <p:nvPr/>
+        </p:nvSpPr>
+        <p:spPr>
+          <a:xfrm>
+            <a:off x="5553699" y="1600200"/>
+            <a:ext cx="6071373" cy="704088"/>
+          </a:xfrm>
+          <a:prstGeom prst="rect">
+            <a:avLst/>
+          </a:prstGeom>
+          <a:noFill/>
+        </p:spPr>
+        <p:txBody>
+          <a:bodyPr wrap="square" lIns="0" rIns="0" tIns="0" bIns="0" anchor="ctr"/>
+          <a:lstStyle/>
+          <a:p>
+            <a:pPr algn="l">
+              <a:lnSpc>
+                <a:spcPct val="100000"/>
+              </a:lnSpc>
+              <a:spcBef>
+                <a:spcPts val="0"/>
+              </a:spcBef>
+              <a:spcAft>
+                <a:spcPts val="0"/>
+              </a:spcAft>
+            </a:pPr>
+            <a:r>
+              <a:rPr sz="1300" b="0">
+                <a:solidFill>
+                  <a:srgbClr val="5C564C"/>
+                </a:solidFill>
+                <a:latin typeface="Calibri"/>
+              </a:rPr>
+              <a:t>churn_rate_quarter    main.cs.churn_monthly</a:t>
+            </a:r>
+          </a:p>
+        </p:txBody>
+      </p:sp>
+      <p:sp>
+        <p:nvSpPr>
+          <p:cNvPr id="8" name="Rectangle 7"/>
+          <p:cNvSpPr/>
+          <p:nvPr/>
+        </p:nvSpPr>
+        <p:spPr>
+          <a:xfrm>
+            <a:off x="566928" y="3054096"/>
+            <a:ext cx="11058144" cy="9144"/>
+          </a:xfrm>
+          <a:prstGeom prst="rect">
+            <a:avLst/>
+          </a:prstGeom>
+          <a:solidFill>
+            <a:srgbClr val="E3DCD0"/>
+          </a:solidFill>
+          <a:ln>
+            <a:noFill/>
+          </a:ln>
+        </p:spPr>
+        <p:style>
+          <a:lnRef idx="1">
+            <a:schemeClr val="accent1"/>
+          </a:lnRef>
+          <a:fillRef idx="3">
+            <a:schemeClr val="accent1"/>
+          </a:fillRef>
+          <a:effectRef idx="2">
+            <a:schemeClr val="accent1"/>
+          </a:effectRef>
+          <a:fontRef idx="minor">
+            <a:schemeClr val="lt1"/>
+          </a:fontRef>
+        </p:style>
+        <p:txBody>
+          <a:bodyPr rtlCol="0" anchor="ctr"/>
+          <a:lstStyle/>
+          <a:p>
+            <a:pPr algn="ctr"/>
+          </a:p>
+        </p:txBody>
+      </p:sp>
+      <p:sp>
+        <p:nvSpPr>
+          <p:cNvPr id="9" name="TextBox 8"/>
+          <p:cNvSpPr txBox="1"/>
+          <p:nvPr/>
+        </p:nvSpPr>
+        <p:spPr>
+          <a:xfrm>
+            <a:off x="566928" y="2331720"/>
+            <a:ext cx="914400" cy="704088"/>
+          </a:xfrm>
+          <a:prstGeom prst="rect">
+            <a:avLst/>
+          </a:prstGeom>
+          <a:noFill/>
+        </p:spPr>
+        <p:txBody>
+          <a:bodyPr wrap="square" lIns="0" rIns="0" tIns="0" bIns="0" anchor="ctr"/>
+          <a:lstStyle/>
+          <a:p>
+            <a:pPr algn="l">
+              <a:lnSpc>
+                <a:spcPct val="100000"/>
+              </a:lnSpc>
+              <a:spcBef>
+                <a:spcPts val="0"/>
+              </a:spcBef>
+              <a:spcAft>
+                <a:spcPts val="0"/>
+              </a:spcAft>
+            </a:pPr>
+            <a:r>
+              <a:rPr sz="1500" b="0">
+                <a:solidFill>
+                  <a:srgbClr val="9C4221"/>
+                </a:solidFill>
+                <a:latin typeface="Georgia"/>
+              </a:rPr>
+              <a:t>f2 ·</a:t>
+            </a:r>
+          </a:p>
+        </p:txBody>
+      </p:sp>
+      <p:sp>
+        <p:nvSpPr>
+          <p:cNvPr id="10" name="TextBox 9"/>
+          <p:cNvSpPr txBox="1"/>
+          <p:nvPr/>
+        </p:nvSpPr>
+        <p:spPr>
+          <a:xfrm>
+            <a:off x="1572768" y="2331720"/>
+            <a:ext cx="3980931" cy="704088"/>
+          </a:xfrm>
+          <a:prstGeom prst="rect">
+            <a:avLst/>
+          </a:prstGeom>
+          <a:noFill/>
+        </p:spPr>
+        <p:txBody>
+          <a:bodyPr wrap="square" lIns="0" rIns="0" tIns="0" bIns="0" anchor="ctr"/>
+          <a:lstStyle/>
+          <a:p>
+            <a:pPr algn="l">
+              <a:lnSpc>
+                <a:spcPct val="100000"/>
+              </a:lnSpc>
+              <a:spcBef>
+                <a:spcPts val="0"/>
+              </a:spcBef>
+              <a:spcAft>
+                <a:spcPts val="0"/>
+              </a:spcAft>
+            </a:pPr>
+            <a:r>
+              <a:rPr sz="1500" b="0">
+                <a:solidFill>
+                  <a:srgbClr val="1C1915"/>
+                </a:solidFill>
+                <a:latin typeface="Calibri"/>
+              </a:rPr>
+              <a:t>Monthly NRR (weighted)</a:t>
+            </a:r>
+          </a:p>
+        </p:txBody>
+      </p:sp>
+      <p:sp>
+        <p:nvSpPr>
+          <p:cNvPr id="11" name="TextBox 10"/>
+          <p:cNvSpPr txBox="1"/>
+          <p:nvPr/>
+        </p:nvSpPr>
+        <p:spPr>
+          <a:xfrm>
+            <a:off x="5553699" y="2331720"/>
+            <a:ext cx="6071373" cy="704088"/>
+          </a:xfrm>
+          <a:prstGeom prst="rect">
+            <a:avLst/>
+          </a:prstGeom>
+          <a:noFill/>
+        </p:spPr>
+        <p:txBody>
+          <a:bodyPr wrap="square" lIns="0" rIns="0" tIns="0" bIns="0" anchor="ctr"/>
+          <a:lstStyle/>
+          <a:p>
+            <a:pPr algn="l">
+              <a:lnSpc>
+                <a:spcPct val="100000"/>
+              </a:lnSpc>
+              <a:spcBef>
+                <a:spcPts val="0"/>
+              </a:spcBef>
+              <a:spcAft>
+                <a:spcPts val="0"/>
+              </a:spcAft>
+            </a:pPr>
+            <a:r>
+              <a:rPr sz="1300" b="0">
+                <a:solidFill>
+                  <a:srgbClr val="5C564C"/>
+                </a:solidFill>
+                <a:latin typeface="Calibri"/>
+              </a:rPr>
+              <a:t>nrr_quarter    main.cs.revenue_monthly</a:t>
+            </a:r>
+          </a:p>
+        </p:txBody>
+      </p:sp>
+      <p:sp>
+        <p:nvSpPr>
+          <p:cNvPr id="12" name="Rectangle 11"/>
+          <p:cNvSpPr/>
+          <p:nvPr/>
+        </p:nvSpPr>
+        <p:spPr>
+          <a:xfrm>
+            <a:off x="566928" y="3785616"/>
+            <a:ext cx="11058144" cy="9144"/>
+          </a:xfrm>
+          <a:prstGeom prst="rect">
+            <a:avLst/>
+          </a:prstGeom>
+          <a:solidFill>
+            <a:srgbClr val="E3DCD0"/>
+          </a:solidFill>
+          <a:ln>
+            <a:noFill/>
+          </a:ln>
+        </p:spPr>
+        <p:style>
+          <a:lnRef idx="1">
+            <a:schemeClr val="accent1"/>
+          </a:lnRef>
+          <a:fillRef idx="3">
+            <a:schemeClr val="accent1"/>
+          </a:fillRef>
+          <a:effectRef idx="2">
+            <a:schemeClr val="accent1"/>
+          </a:effectRef>
+          <a:fontRef idx="minor">
+            <a:schemeClr val="lt1"/>
+          </a:fontRef>
+        </p:style>
+        <p:txBody>
+          <a:bodyPr rtlCol="0" anchor="ctr"/>
+          <a:lstStyle/>
+          <a:p>
+            <a:pPr algn="ctr"/>
+          </a:p>
+        </p:txBody>
+      </p:sp>
+      <p:sp>
+        <p:nvSpPr>
+          <p:cNvPr id="13" name="TextBox 12"/>
+          <p:cNvSpPr txBox="1"/>
+          <p:nvPr/>
+        </p:nvSpPr>
+        <p:spPr>
+          <a:xfrm>
+            <a:off x="566928" y="3063240"/>
+            <a:ext cx="914400" cy="704088"/>
+          </a:xfrm>
+          <a:prstGeom prst="rect">
+            <a:avLst/>
+          </a:prstGeom>
+          <a:noFill/>
+        </p:spPr>
+        <p:txBody>
+          <a:bodyPr wrap="square" lIns="0" rIns="0" tIns="0" bIns="0" anchor="ctr"/>
+          <a:lstStyle/>
+          <a:p>
+            <a:pPr algn="l">
+              <a:lnSpc>
+                <a:spcPct val="100000"/>
+              </a:lnSpc>
+              <a:spcBef>
+                <a:spcPts val="0"/>
+              </a:spcBef>
+              <a:spcAft>
+                <a:spcPts val="0"/>
+              </a:spcAft>
+            </a:pPr>
+            <a:r>
+              <a:rPr sz="1500" b="0">
+                <a:solidFill>
+                  <a:srgbClr val="9C4221"/>
+                </a:solidFill>
+                <a:latin typeface="Georgia"/>
+              </a:rPr>
+              <a:t>f3 ·</a:t>
+            </a:r>
+          </a:p>
+        </p:txBody>
+      </p:sp>
+      <p:sp>
+        <p:nvSpPr>
+          <p:cNvPr id="14" name="TextBox 13"/>
+          <p:cNvSpPr txBox="1"/>
+          <p:nvPr/>
+        </p:nvSpPr>
+        <p:spPr>
+          <a:xfrm>
+            <a:off x="1572768" y="3063240"/>
+            <a:ext cx="3980931" cy="704088"/>
+          </a:xfrm>
+          <a:prstGeom prst="rect">
+            <a:avLst/>
+          </a:prstGeom>
+          <a:noFill/>
+        </p:spPr>
+        <p:txBody>
+          <a:bodyPr wrap="square" lIns="0" rIns="0" tIns="0" bIns="0" anchor="ctr"/>
+          <a:lstStyle/>
+          <a:p>
+            <a:pPr algn="l">
+              <a:lnSpc>
+                <a:spcPct val="100000"/>
+              </a:lnSpc>
+              <a:spcBef>
+                <a:spcPts val="0"/>
+              </a:spcBef>
+              <a:spcAft>
+                <a:spcPts val="0"/>
+              </a:spcAft>
+            </a:pPr>
+            <a:r>
+              <a:rPr sz="1500" b="0">
+                <a:solidFill>
+                  <a:srgbClr val="1C1915"/>
+                </a:solidFill>
+                <a:latin typeface="Calibri"/>
+              </a:rPr>
+              <a:t>Active subscriptions</a:t>
+            </a:r>
+          </a:p>
+        </p:txBody>
+      </p:sp>
+      <p:sp>
+        <p:nvSpPr>
+          <p:cNvPr id="15" name="TextBox 14"/>
+          <p:cNvSpPr txBox="1"/>
+          <p:nvPr/>
+        </p:nvSpPr>
+        <p:spPr>
+          <a:xfrm>
+            <a:off x="5553699" y="3063240"/>
+            <a:ext cx="6071373" cy="704088"/>
+          </a:xfrm>
+          <a:prstGeom prst="rect">
+            <a:avLst/>
+          </a:prstGeom>
+          <a:noFill/>
+        </p:spPr>
+        <p:txBody>
+          <a:bodyPr wrap="square" lIns="0" rIns="0" tIns="0" bIns="0" anchor="ctr"/>
+          <a:lstStyle/>
+          <a:p>
+            <a:pPr algn="l">
+              <a:lnSpc>
+                <a:spcPct val="100000"/>
+              </a:lnSpc>
+              <a:spcBef>
+                <a:spcPts val="0"/>
+              </a:spcBef>
+              <a:spcAft>
+                <a:spcPts val="0"/>
+              </a:spcAft>
+            </a:pPr>
+            <a:r>
+              <a:rPr sz="1300" b="0">
+                <a:solidFill>
+                  <a:srgbClr val="5C564C"/>
+                </a:solidFill>
+                <a:latin typeface="Calibri"/>
+              </a:rPr>
+              <a:t>active_subscriptions    main.cs.churn_monthly</a:t>
+            </a:r>
+          </a:p>
+        </p:txBody>
+      </p:sp>
+      <p:sp>
+        <p:nvSpPr>
+          <p:cNvPr id="16" name="Rectangle 15"/>
+          <p:cNvSpPr/>
+          <p:nvPr/>
+        </p:nvSpPr>
+        <p:spPr>
+          <a:xfrm>
+            <a:off x="566928" y="4517136"/>
+            <a:ext cx="11058144" cy="9144"/>
+          </a:xfrm>
+          <a:prstGeom prst="rect">
+            <a:avLst/>
+          </a:prstGeom>
+          <a:solidFill>
+            <a:srgbClr val="E3DCD0"/>
+          </a:solidFill>
+          <a:ln>
+            <a:noFill/>
+          </a:ln>
+        </p:spPr>
+        <p:style>
+          <a:lnRef idx="1">
+            <a:schemeClr val="accent1"/>
+          </a:lnRef>
+          <a:fillRef idx="3">
+            <a:schemeClr val="accent1"/>
+          </a:fillRef>
+          <a:effectRef idx="2">
+            <a:schemeClr val="accent1"/>
+          </a:effectRef>
+          <a:fontRef idx="minor">
+            <a:schemeClr val="lt1"/>
+          </a:fontRef>
+        </p:style>
+        <p:txBody>
+          <a:bodyPr rtlCol="0" anchor="ctr"/>
+          <a:lstStyle/>
+          <a:p>
+            <a:pPr algn="ctr"/>
+          </a:p>
+        </p:txBody>
+      </p:sp>
+      <p:sp>
+        <p:nvSpPr>
+          <p:cNvPr id="17" name="TextBox 16"/>
+          <p:cNvSpPr txBox="1"/>
+          <p:nvPr/>
+        </p:nvSpPr>
+        <p:spPr>
+          <a:xfrm>
+            <a:off x="566928" y="3794760"/>
+            <a:ext cx="914400" cy="704088"/>
+          </a:xfrm>
+          <a:prstGeom prst="rect">
+            <a:avLst/>
+          </a:prstGeom>
+          <a:noFill/>
+        </p:spPr>
+        <p:txBody>
+          <a:bodyPr wrap="square" lIns="0" rIns="0" tIns="0" bIns="0" anchor="ctr"/>
+          <a:lstStyle/>
+          <a:p>
+            <a:pPr algn="l">
+              <a:lnSpc>
+                <a:spcPct val="100000"/>
+              </a:lnSpc>
+              <a:spcBef>
+                <a:spcPts val="0"/>
+              </a:spcBef>
+              <a:spcAft>
+                <a:spcPts val="0"/>
+              </a:spcAft>
+            </a:pPr>
+            <a:r>
+              <a:rPr sz="1500" b="0">
+                <a:solidFill>
+                  <a:srgbClr val="9C4221"/>
+                </a:solidFill>
+                <a:latin typeface="Georgia"/>
+              </a:rPr>
+              <a:t>f4 ·</a:t>
+            </a:r>
+          </a:p>
+        </p:txBody>
+      </p:sp>
+      <p:sp>
+        <p:nvSpPr>
+          <p:cNvPr id="18" name="TextBox 17"/>
+          <p:cNvSpPr txBox="1"/>
+          <p:nvPr/>
+        </p:nvSpPr>
+        <p:spPr>
+          <a:xfrm>
+            <a:off x="1572768" y="3794760"/>
+            <a:ext cx="3980931" cy="704088"/>
+          </a:xfrm>
+          <a:prstGeom prst="rect">
+            <a:avLst/>
+          </a:prstGeom>
+          <a:noFill/>
+        </p:spPr>
+        <p:txBody>
+          <a:bodyPr wrap="square" lIns="0" rIns="0" tIns="0" bIns="0" anchor="ctr"/>
+          <a:lstStyle/>
+          <a:p>
+            <a:pPr algn="l">
+              <a:lnSpc>
+                <a:spcPct val="100000"/>
+              </a:lnSpc>
+              <a:spcBef>
+                <a:spcPts val="0"/>
+              </a:spcBef>
+              <a:spcAft>
+                <a:spcPts val="0"/>
+              </a:spcAft>
+            </a:pPr>
+            <a:r>
+              <a:rPr sz="1500" b="0">
+                <a:solidFill>
+                  <a:srgbClr val="1C1915"/>
+                </a:solidFill>
+                <a:latin typeface="Calibri"/>
+              </a:rPr>
+              <a:t>Monthly churn</a:t>
+            </a:r>
+          </a:p>
+        </p:txBody>
+      </p:sp>
+      <p:sp>
+        <p:nvSpPr>
+          <p:cNvPr id="19" name="TextBox 18"/>
+          <p:cNvSpPr txBox="1"/>
+          <p:nvPr/>
+        </p:nvSpPr>
+        <p:spPr>
+          <a:xfrm>
+            <a:off x="5553699" y="3794760"/>
+            <a:ext cx="6071373" cy="704088"/>
+          </a:xfrm>
+          <a:prstGeom prst="rect">
+            <a:avLst/>
+          </a:prstGeom>
+          <a:noFill/>
+        </p:spPr>
+        <p:txBody>
+          <a:bodyPr wrap="square" lIns="0" rIns="0" tIns="0" bIns="0" anchor="ctr"/>
+          <a:lstStyle/>
+          <a:p>
+            <a:pPr algn="l">
+              <a:lnSpc>
+                <a:spcPct val="100000"/>
+              </a:lnSpc>
+              <a:spcBef>
+                <a:spcPts val="0"/>
+              </a:spcBef>
+              <a:spcAft>
+                <a:spcPts val="0"/>
+              </a:spcAft>
+            </a:pPr>
+            <a:r>
+              <a:rPr sz="1300" b="0">
+                <a:solidFill>
+                  <a:srgbClr val="5C564C"/>
+                </a:solidFill>
+                <a:latin typeface="Calibri"/>
+              </a:rPr>
+              <a:t>churn_trend_monthly    main.cs.churn_monthly</a:t>
+            </a:r>
+          </a:p>
+        </p:txBody>
+      </p:sp>
+      <p:sp>
+        <p:nvSpPr>
+          <p:cNvPr id="20" name="Rectangle 19"/>
+          <p:cNvSpPr/>
+          <p:nvPr/>
+        </p:nvSpPr>
+        <p:spPr>
+          <a:xfrm>
+            <a:off x="566928" y="5248656"/>
+            <a:ext cx="11058144" cy="9144"/>
+          </a:xfrm>
+          <a:prstGeom prst="rect">
+            <a:avLst/>
+          </a:prstGeom>
+          <a:solidFill>
+            <a:srgbClr val="E3DCD0"/>
+          </a:solidFill>
+          <a:ln>
+            <a:noFill/>
+          </a:ln>
+        </p:spPr>
+        <p:style>
+          <a:lnRef idx="1">
+            <a:schemeClr val="accent1"/>
+          </a:lnRef>
+          <a:fillRef idx="3">
+            <a:schemeClr val="accent1"/>
+          </a:fillRef>
+          <a:effectRef idx="2">
+            <a:schemeClr val="accent1"/>
+          </a:effectRef>
+          <a:fontRef idx="minor">
+            <a:schemeClr val="lt1"/>
+          </a:fontRef>
+        </p:style>
+        <p:txBody>
+          <a:bodyPr rtlCol="0" anchor="ctr"/>
+          <a:lstStyle/>
+          <a:p>
+            <a:pPr algn="ctr"/>
+          </a:p>
+        </p:txBody>
+      </p:sp>
+      <p:sp>
+        <p:nvSpPr>
+          <p:cNvPr id="21" name="TextBox 20"/>
+          <p:cNvSpPr txBox="1"/>
+          <p:nvPr/>
+        </p:nvSpPr>
+        <p:spPr>
+          <a:xfrm>
+            <a:off x="566928" y="4526280"/>
+            <a:ext cx="914400" cy="704088"/>
+          </a:xfrm>
+          <a:prstGeom prst="rect">
+            <a:avLst/>
+          </a:prstGeom>
+          <a:noFill/>
+        </p:spPr>
+        <p:txBody>
+          <a:bodyPr wrap="square" lIns="0" rIns="0" tIns="0" bIns="0" anchor="ctr"/>
+          <a:lstStyle/>
+          <a:p>
+            <a:pPr algn="l">
+              <a:lnSpc>
+                <a:spcPct val="100000"/>
+              </a:lnSpc>
+              <a:spcBef>
+                <a:spcPts val="0"/>
+              </a:spcBef>
+              <a:spcAft>
+                <a:spcPts val="0"/>
+              </a:spcAft>
+            </a:pPr>
+            <a:r>
+              <a:rPr sz="1500" b="0">
+                <a:solidFill>
+                  <a:srgbClr val="9C4221"/>
+                </a:solidFill>
+                <a:latin typeface="Georgia"/>
+              </a:rPr>
+              <a:t>f5 ·</a:t>
+            </a:r>
+          </a:p>
+        </p:txBody>
+      </p:sp>
+      <p:sp>
+        <p:nvSpPr>
+          <p:cNvPr id="22" name="TextBox 21"/>
+          <p:cNvSpPr txBox="1"/>
+          <p:nvPr/>
+        </p:nvSpPr>
+        <p:spPr>
+          <a:xfrm>
+            <a:off x="1572768" y="4526280"/>
+            <a:ext cx="3980931" cy="704088"/>
+          </a:xfrm>
+          <a:prstGeom prst="rect">
+            <a:avLst/>
+          </a:prstGeom>
+          <a:noFill/>
+        </p:spPr>
+        <p:txBody>
+          <a:bodyPr wrap="square" lIns="0" rIns="0" tIns="0" bIns="0" anchor="ctr"/>
+          <a:lstStyle/>
+          <a:p>
+            <a:pPr algn="l">
+              <a:lnSpc>
+                <a:spcPct val="100000"/>
+              </a:lnSpc>
+              <a:spcBef>
+                <a:spcPts val="0"/>
+              </a:spcBef>
+              <a:spcAft>
+                <a:spcPts val="0"/>
+              </a:spcAft>
+            </a:pPr>
+            <a:r>
+              <a:rPr sz="1500" b="0">
+                <a:solidFill>
+                  <a:srgbClr val="1C1915"/>
+                </a:solidFill>
+                <a:latin typeface="Calibri"/>
+              </a:rPr>
+              <a:t>Weighted monthly churn by segment</a:t>
+            </a:r>
+          </a:p>
+        </p:txBody>
+      </p:sp>
+      <p:sp>
+        <p:nvSpPr>
+          <p:cNvPr id="23" name="TextBox 22"/>
+          <p:cNvSpPr txBox="1"/>
+          <p:nvPr/>
+        </p:nvSpPr>
+        <p:spPr>
+          <a:xfrm>
+            <a:off x="5553699" y="4526280"/>
+            <a:ext cx="6071373" cy="704088"/>
+          </a:xfrm>
+          <a:prstGeom prst="rect">
+            <a:avLst/>
+          </a:prstGeom>
+          <a:noFill/>
+        </p:spPr>
+        <p:txBody>
+          <a:bodyPr wrap="square" lIns="0" rIns="0" tIns="0" bIns="0" anchor="ctr"/>
+          <a:lstStyle/>
+          <a:p>
+            <a:pPr algn="l">
+              <a:lnSpc>
+                <a:spcPct val="100000"/>
+              </a:lnSpc>
+              <a:spcBef>
+                <a:spcPts val="0"/>
+              </a:spcBef>
+              <a:spcAft>
+                <a:spcPts val="0"/>
+              </a:spcAft>
+            </a:pPr>
+            <a:r>
+              <a:rPr sz="1300" b="0">
+                <a:solidFill>
+                  <a:srgbClr val="5C564C"/>
+                </a:solidFill>
+                <a:latin typeface="Calibri"/>
+              </a:rPr>
+              <a:t>churn_by_segment    main.cs.churn_monthly</a:t>
+            </a:r>
+          </a:p>
+        </p:txBody>
+      </p:sp>
+      <p:sp>
+        <p:nvSpPr>
+          <p:cNvPr id="24" name="Rectangle 23"/>
+          <p:cNvSpPr/>
+          <p:nvPr/>
+        </p:nvSpPr>
+        <p:spPr>
+          <a:xfrm>
+            <a:off x="566928" y="6437376"/>
+            <a:ext cx="11058144" cy="9144"/>
+          </a:xfrm>
+          <a:prstGeom prst="rect">
+            <a:avLst/>
+          </a:prstGeom>
+          <a:solidFill>
+            <a:srgbClr val="E3DCD0"/>
+          </a:solidFill>
+          <a:ln>
+            <a:noFill/>
+          </a:ln>
+        </p:spPr>
+        <p:style>
+          <a:lnRef idx="1">
+            <a:schemeClr val="accent1"/>
+          </a:lnRef>
+          <a:fillRef idx="3">
+            <a:schemeClr val="accent1"/>
+          </a:fillRef>
+          <a:effectRef idx="2">
+            <a:schemeClr val="accent1"/>
+          </a:effectRef>
+          <a:fontRef idx="minor">
+            <a:schemeClr val="lt1"/>
+          </a:fontRef>
+        </p:style>
+        <p:txBody>
+          <a:bodyPr rtlCol="0" anchor="ctr"/>
+          <a:lstStyle/>
+          <a:p>
+            <a:pPr algn="ctr"/>
+          </a:p>
+        </p:txBody>
+      </p:sp>
+      <p:sp>
+        <p:nvSpPr>
+          <p:cNvPr id="25" name="TextBox 24"/>
+          <p:cNvSpPr txBox="1"/>
+          <p:nvPr/>
+        </p:nvSpPr>
+        <p:spPr>
+          <a:xfrm>
+            <a:off x="10984992" y="6483096"/>
+            <a:ext cx="640080" cy="292608"/>
+          </a:xfrm>
+          <a:prstGeom prst="rect">
+            <a:avLst/>
+          </a:prstGeom>
+          <a:noFill/>
+        </p:spPr>
+        <p:txBody>
+          <a:bodyPr wrap="square" lIns="0" rIns="0" tIns="0" bIns="0" anchor="ctr"/>
+          <a:lstStyle/>
+          <a:p>
+            <a:pPr algn="r">
+              <a:lnSpc>
+                <a:spcPct val="100000"/>
+              </a:lnSpc>
+              <a:spcBef>
+                <a:spcPts val="0"/>
+              </a:spcBef>
+              <a:spcAft>
+                <a:spcPts val="0"/>
+              </a:spcAft>
+            </a:pPr>
+            <a:r>
+              <a:rPr sz="1300" b="0">
+                <a:solidFill>
+                  <a:srgbClr val="1C1915"/>
+                </a:solidFill>
+                <a:latin typeface="Georgia"/>
+              </a:rPr>
+              <a:t>V</a:t>
             </a:r>
           </a:p>
         </p:txBody>

--- a/docs/examples/sample-deck.pptx
+++ b/docs/examples/sample-deck.pptx
@@ -210,6 +210,7 @@
                   </a:pPr>
                 </a:p>
               </c:txPr>
+              <c:dLblPos val="r"/>
               <c:showLegendKey val="0"/>
               <c:showVal val="1"/>
               <c:showCatName val="0"/>
@@ -258,6 +259,7 @@
                   </a:pPr>
                 </a:p>
               </c:txPr>
+              <c:dLblPos val="l"/>
               <c:showLegendKey val="0"/>
               <c:showVal val="1"/>
               <c:showCatName val="0"/>
@@ -279,13 +281,13 @@
               <c:strCache>
                 <c:ptCount val="3"/>
                 <c:pt idx="0">
-                  <c:v>2026-07</c:v>
+                  <c:v>Jul</c:v>
                 </c:pt>
                 <c:pt idx="1">
-                  <c:v>2026-08</c:v>
+                  <c:v>Aug</c:v>
                 </c:pt>
                 <c:pt idx="2">
-                  <c:v>2026-09</c:v>
+                  <c:v>Sep</c:v>
                 </c:pt>
               </c:strCache>
             </c:strRef>
@@ -381,8 +383,8 @@
       <c:valAx>
         <c:axId val="2140495176"/>
         <c:scaling>
-          <c:max val="0.02562734479891802"/>
-          <c:min val="0.021401826564709563"/>
+          <c:max val="0.025838620710628445"/>
+          <c:min val="0.02055672291786787"/>
         </c:scaling>
         <c:delete/>
         <c:axPos val="l"/>
@@ -1170,17 +1172,22 @@
           <a:lstStyle/>
           <a:p>
             <a:r>
-              <a:t>f1 · Monthly churn (weighted) · churn_rate_quarter · main.cs.churn_monthly · statement duckdb-340e134303f9 · queried 2026-10-18 07:24 UTC</a:t>
-            </a:r>
-          </a:p>
-          <a:p>
-            <a:r>
-              <a:t>f2 · Monthly NRR (weighted) · nrr_quarter · main.cs.revenue_monthly · statement duckdb-b591257632fc · queried 2026-10-18 07:24 UTC</a:t>
-            </a:r>
-          </a:p>
-          <a:p>
-            <a:r>
-              <a:t>f3 · Active subscriptions · active_subscriptions · main.cs.churn_monthly · statement duckdb-e8b898c41384 · queried 2026-10-18 07:24 UTC</a:t>
+              <a:t>f1 · Monthly churn (weighted) · churn_rate_quarter · main.cs.churn_monthly · statement duckdb-2d0b066a031a · queried 2026-10-18 07:41 UTC</a:t>
+            </a:r>
+          </a:p>
+          <a:p>
+            <a:r>
+              <a:t>f2 · Monthly NRR (weighted) · nrr_quarter · main.cs.revenue_monthly · statement duckdb-155de445a62c · queried 2026-10-18 07:41 UTC</a:t>
+            </a:r>
+          </a:p>
+          <a:p>
+            <a:r>
+              <a:t>f3 · Active subscriptions · active_subscriptions · main.cs.churn_monthly · statement duckdb-a81513bbd28d · queried 2026-10-18 07:41 UTC</a:t>
+            </a:r>
+          </a:p>
+          <a:p>
+            <a:r>
+              <a:t>f4 · Monthly churn · churn_trend_monthly · main.cs.churn_monthly · statement duckdb-8a32313abbf5 · queried 2026-10-18 07:41 UTC</a:t>
             </a:r>
           </a:p>
           <a:p>
@@ -1241,6 +1248,26 @@
           <a:p>
             <a:r>
               <a:t>f3 template SHA-256: 0e1eca481a61ce5a487969e9b73097141164bf4d00f5b0c10955808376a6caaf</a:t>
+            </a:r>
+          </a:p>
+          <a:p>
+            <a:r>
+              <a:t>f4 SQL:</a:t>
+            </a:r>
+          </a:p>
+          <a:p>
+            <a:r>
+              <a:t>SELECT STRFTIME(CAST("month" AS TIMESTAMP), '%Y-%m') AS period, CASE WHEN SUM(active_start) &lt;&gt; 0 THEN SUM(churned) / SUM(active_start) ELSE NULL END AS churn_rate FROM lake.cs.v_churn_monthly__bob WHERE "month" &gt;= $start_month AND "month" &lt; $end_month GROUP BY STRFTIME(CAST("month" AS TIMESTAMP), '%Y-%m') ORDER BY period NULLS FIRST</a:t>
+            </a:r>
+          </a:p>
+          <a:p>
+            <a:r>
+              <a:t>f4 parameters: {"end_month": "2026-10-01", "start_month": "2026-07-01"}</a:t>
+            </a:r>
+          </a:p>
+          <a:p>
+            <a:r>
+              <a:t>f4 template SHA-256: a65c9afc5de386b7fa7a0a0e07559acc0c0782b68368b4788443dcc983561b89</a:t>
             </a:r>
           </a:p>
         </p:txBody>
@@ -1310,7 +1337,7 @@
           <a:lstStyle/>
           <a:p>
             <a:r>
-              <a:t>f4 · Monthly churn · churn_trend_monthly · main.cs.churn_monthly · statement duckdb-a0f80dfe22cb · queried 2026-10-18 07:24 UTC</a:t>
+              <a:t>f4 · Monthly churn · churn_trend_monthly · main.cs.churn_monthly · statement duckdb-8a32313abbf5 · queried 2026-10-18 07:41 UTC</a:t>
             </a:r>
           </a:p>
           <a:p>
@@ -1400,7 +1427,7 @@
           <a:lstStyle/>
           <a:p>
             <a:r>
-              <a:t>f5 · Weighted monthly churn by segment · churn_by_segment · main.cs.churn_monthly · statement duckdb-1b44996c3695 · queried 2026-10-18 07:24 UTC</a:t>
+              <a:t>f5 · Weighted monthly churn by segment · churn_by_segment · main.cs.churn_monthly · statement duckdb-2a5b138f207b · queried 2026-10-18 07:41 UTC</a:t>
             </a:r>
           </a:p>
           <a:p>
@@ -1490,27 +1517,27 @@
           <a:lstStyle/>
           <a:p>
             <a:r>
-              <a:t>f1 · Monthly churn (weighted) · churn_rate_quarter · main.cs.churn_monthly · statement duckdb-340e134303f9 · queried 2026-10-18 07:24 UTC</a:t>
-            </a:r>
-          </a:p>
-          <a:p>
-            <a:r>
-              <a:t>f2 · Monthly NRR (weighted) · nrr_quarter · main.cs.revenue_monthly · statement duckdb-b591257632fc · queried 2026-10-18 07:24 UTC</a:t>
-            </a:r>
-          </a:p>
-          <a:p>
-            <a:r>
-              <a:t>f3 · Active subscriptions · active_subscriptions · main.cs.churn_monthly · statement duckdb-e8b898c41384 · queried 2026-10-18 07:24 UTC</a:t>
-            </a:r>
-          </a:p>
-          <a:p>
-            <a:r>
-              <a:t>f4 · Monthly churn · churn_trend_monthly · main.cs.churn_monthly · statement duckdb-a0f80dfe22cb · queried 2026-10-18 07:24 UTC</a:t>
-            </a:r>
-          </a:p>
-          <a:p>
-            <a:r>
-              <a:t>f5 · Weighted monthly churn by segment · churn_by_segment · main.cs.churn_monthly · statement duckdb-1b44996c3695 · queried 2026-10-18 07:24 UTC</a:t>
+              <a:t>f1 · Monthly churn (weighted) · churn_rate_quarter · main.cs.churn_monthly · statement duckdb-2d0b066a031a · queried 2026-10-18 07:41 UTC</a:t>
+            </a:r>
+          </a:p>
+          <a:p>
+            <a:r>
+              <a:t>f2 · Monthly NRR (weighted) · nrr_quarter · main.cs.revenue_monthly · statement duckdb-155de445a62c · queried 2026-10-18 07:41 UTC</a:t>
+            </a:r>
+          </a:p>
+          <a:p>
+            <a:r>
+              <a:t>f3 · Active subscriptions · active_subscriptions · main.cs.churn_monthly · statement duckdb-a81513bbd28d · queried 2026-10-18 07:41 UTC</a:t>
+            </a:r>
+          </a:p>
+          <a:p>
+            <a:r>
+              <a:t>f4 · Monthly churn · churn_trend_monthly · main.cs.churn_monthly · statement duckdb-8a32313abbf5 · queried 2026-10-18 07:41 UTC</a:t>
+            </a:r>
+          </a:p>
+          <a:p>
+            <a:r>
+              <a:t>f5 · Weighted monthly churn by segment · churn_by_segment · main.cs.churn_monthly · statement duckdb-2a5b138f207b · queried 2026-10-18 07:41 UTC</a:t>
             </a:r>
           </a:p>
           <a:p>
@@ -4632,8 +4659,8 @@
         </p:nvSpPr>
         <p:spPr>
           <a:xfrm>
-            <a:off x="7071359" y="0"/>
-            <a:ext cx="5120641" cy="6858000"/>
+            <a:off x="6827520" y="0"/>
+            <a:ext cx="5364480" cy="6858000"/>
           </a:xfrm>
           <a:prstGeom prst="rect">
             <a:avLst/>
@@ -4675,8 +4702,8 @@
         </p:nvSpPr>
         <p:spPr>
           <a:xfrm>
-            <a:off x="7016495" y="0"/>
-            <a:ext cx="54864" cy="6858000"/>
+            <a:off x="6781800" y="0"/>
+            <a:ext cx="45720" cy="6858000"/>
           </a:xfrm>
           <a:prstGeom prst="rect">
             <a:avLst/>
@@ -4712,14 +4739,272 @@
       </p:sp>
       <p:sp>
         <p:nvSpPr>
-          <p:cNvPr id="4" name="TextBox 3"/>
+          <p:cNvPr id="4" name="Rectangle 3"/>
+          <p:cNvSpPr/>
+          <p:nvPr/>
+        </p:nvSpPr>
+        <p:spPr>
+          <a:xfrm>
+            <a:off x="7467600" y="5824728"/>
+            <a:ext cx="457200" cy="576072"/>
+          </a:xfrm>
+          <a:prstGeom prst="rect">
+            <a:avLst/>
+          </a:prstGeom>
+          <a:solidFill>
+            <a:srgbClr val="9C4221"/>
+          </a:solidFill>
+          <a:ln>
+            <a:noFill/>
+          </a:ln>
+        </p:spPr>
+        <p:style>
+          <a:lnRef idx="1">
+            <a:schemeClr val="accent1"/>
+          </a:lnRef>
+          <a:fillRef idx="3">
+            <a:schemeClr val="accent1"/>
+          </a:fillRef>
+          <a:effectRef idx="2">
+            <a:schemeClr val="accent1"/>
+          </a:effectRef>
+          <a:fontRef idx="minor">
+            <a:schemeClr val="lt1"/>
+          </a:fontRef>
+        </p:style>
+        <p:txBody>
+          <a:bodyPr rtlCol="0" anchor="ctr"/>
+          <a:lstStyle/>
+          <a:p>
+            <a:pPr algn="ctr"/>
+          </a:p>
+        </p:txBody>
+      </p:sp>
+      <p:sp>
+        <p:nvSpPr>
+          <p:cNvPr id="5" name="Rectangle 4"/>
+          <p:cNvSpPr/>
+          <p:nvPr/>
+        </p:nvSpPr>
+        <p:spPr>
+          <a:xfrm>
+            <a:off x="7979664" y="5479085"/>
+            <a:ext cx="457200" cy="921715"/>
+          </a:xfrm>
+          <a:prstGeom prst="rect">
+            <a:avLst/>
+          </a:prstGeom>
+          <a:solidFill>
+            <a:srgbClr val="1A3144"/>
+          </a:solidFill>
+          <a:ln>
+            <a:noFill/>
+          </a:ln>
+        </p:spPr>
+        <p:style>
+          <a:lnRef idx="1">
+            <a:schemeClr val="accent1"/>
+          </a:lnRef>
+          <a:fillRef idx="3">
+            <a:schemeClr val="accent1"/>
+          </a:fillRef>
+          <a:effectRef idx="2">
+            <a:schemeClr val="accent1"/>
+          </a:effectRef>
+          <a:fontRef idx="minor">
+            <a:schemeClr val="lt1"/>
+          </a:fontRef>
+        </p:style>
+        <p:txBody>
+          <a:bodyPr rtlCol="0" anchor="ctr"/>
+          <a:lstStyle/>
+          <a:p>
+            <a:pPr algn="ctr"/>
+          </a:p>
+        </p:txBody>
+      </p:sp>
+      <p:sp>
+        <p:nvSpPr>
+          <p:cNvPr id="6" name="Rectangle 5"/>
+          <p:cNvSpPr/>
+          <p:nvPr/>
+        </p:nvSpPr>
+        <p:spPr>
+          <a:xfrm>
+            <a:off x="8491728" y="5914340"/>
+            <a:ext cx="457200" cy="486460"/>
+          </a:xfrm>
+          <a:prstGeom prst="rect">
+            <a:avLst/>
+          </a:prstGeom>
+          <a:solidFill>
+            <a:srgbClr val="3E6A74"/>
+          </a:solidFill>
+          <a:ln>
+            <a:noFill/>
+          </a:ln>
+        </p:spPr>
+        <p:style>
+          <a:lnRef idx="1">
+            <a:schemeClr val="accent1"/>
+          </a:lnRef>
+          <a:fillRef idx="3">
+            <a:schemeClr val="accent1"/>
+          </a:fillRef>
+          <a:effectRef idx="2">
+            <a:schemeClr val="accent1"/>
+          </a:effectRef>
+          <a:fontRef idx="minor">
+            <a:schemeClr val="lt1"/>
+          </a:fontRef>
+        </p:style>
+        <p:txBody>
+          <a:bodyPr rtlCol="0" anchor="ctr"/>
+          <a:lstStyle/>
+          <a:p>
+            <a:pPr algn="ctr"/>
+          </a:p>
+        </p:txBody>
+      </p:sp>
+      <p:sp>
+        <p:nvSpPr>
+          <p:cNvPr id="7" name="Rectangle 6"/>
+          <p:cNvSpPr/>
+          <p:nvPr/>
+        </p:nvSpPr>
+        <p:spPr>
+          <a:xfrm>
+            <a:off x="9003792" y="5248656"/>
+            <a:ext cx="457200" cy="1152144"/>
+          </a:xfrm>
+          <a:prstGeom prst="rect">
+            <a:avLst/>
+          </a:prstGeom>
+          <a:solidFill>
+            <a:srgbClr val="9C4221"/>
+          </a:solidFill>
+          <a:ln>
+            <a:noFill/>
+          </a:ln>
+        </p:spPr>
+        <p:style>
+          <a:lnRef idx="1">
+            <a:schemeClr val="accent1"/>
+          </a:lnRef>
+          <a:fillRef idx="3">
+            <a:schemeClr val="accent1"/>
+          </a:fillRef>
+          <a:effectRef idx="2">
+            <a:schemeClr val="accent1"/>
+          </a:effectRef>
+          <a:fontRef idx="minor">
+            <a:schemeClr val="lt1"/>
+          </a:fontRef>
+        </p:style>
+        <p:txBody>
+          <a:bodyPr rtlCol="0" anchor="ctr"/>
+          <a:lstStyle/>
+          <a:p>
+            <a:pPr algn="ctr"/>
+          </a:p>
+        </p:txBody>
+      </p:sp>
+      <p:sp>
+        <p:nvSpPr>
+          <p:cNvPr id="8" name="Rectangle 7"/>
+          <p:cNvSpPr/>
+          <p:nvPr/>
+        </p:nvSpPr>
+        <p:spPr>
+          <a:xfrm>
+            <a:off x="9515856" y="5658308"/>
+            <a:ext cx="457200" cy="742492"/>
+          </a:xfrm>
+          <a:prstGeom prst="rect">
+            <a:avLst/>
+          </a:prstGeom>
+          <a:solidFill>
+            <a:srgbClr val="1A3144"/>
+          </a:solidFill>
+          <a:ln>
+            <a:noFill/>
+          </a:ln>
+        </p:spPr>
+        <p:style>
+          <a:lnRef idx="1">
+            <a:schemeClr val="accent1"/>
+          </a:lnRef>
+          <a:fillRef idx="3">
+            <a:schemeClr val="accent1"/>
+          </a:fillRef>
+          <a:effectRef idx="2">
+            <a:schemeClr val="accent1"/>
+          </a:effectRef>
+          <a:fontRef idx="minor">
+            <a:schemeClr val="lt1"/>
+          </a:fontRef>
+        </p:style>
+        <p:txBody>
+          <a:bodyPr rtlCol="0" anchor="ctr"/>
+          <a:lstStyle/>
+          <a:p>
+            <a:pPr algn="ctr"/>
+          </a:p>
+        </p:txBody>
+      </p:sp>
+      <p:sp>
+        <p:nvSpPr>
+          <p:cNvPr id="9" name="Rectangle 8"/>
+          <p:cNvSpPr/>
+          <p:nvPr/>
+        </p:nvSpPr>
+        <p:spPr>
+          <a:xfrm>
+            <a:off x="10027920" y="5376672"/>
+            <a:ext cx="457200" cy="1024128"/>
+          </a:xfrm>
+          <a:prstGeom prst="rect">
+            <a:avLst/>
+          </a:prstGeom>
+          <a:solidFill>
+            <a:srgbClr val="3E6A74"/>
+          </a:solidFill>
+          <a:ln>
+            <a:noFill/>
+          </a:ln>
+        </p:spPr>
+        <p:style>
+          <a:lnRef idx="1">
+            <a:schemeClr val="accent1"/>
+          </a:lnRef>
+          <a:fillRef idx="3">
+            <a:schemeClr val="accent1"/>
+          </a:fillRef>
+          <a:effectRef idx="2">
+            <a:schemeClr val="accent1"/>
+          </a:effectRef>
+          <a:fontRef idx="minor">
+            <a:schemeClr val="lt1"/>
+          </a:fontRef>
+        </p:style>
+        <p:txBody>
+          <a:bodyPr rtlCol="0" anchor="ctr"/>
+          <a:lstStyle/>
+          <a:p>
+            <a:pPr algn="ctr"/>
+          </a:p>
+        </p:txBody>
+      </p:sp>
+      <p:sp>
+        <p:nvSpPr>
+          <p:cNvPr id="10" name="TextBox 9"/>
           <p:cNvSpPr txBox="1"/>
           <p:nvPr/>
         </p:nvSpPr>
         <p:spPr>
           <a:xfrm>
-            <a:off x="566928" y="6035040"/>
-            <a:ext cx="1828800" cy="274320"/>
+            <a:off x="566928" y="1920240"/>
+            <a:ext cx="6077712" cy="2011680"/>
           </a:xfrm>
           <a:prstGeom prst="rect">
             <a:avLst/>
@@ -4742,36 +5027,15 @@
               </a:spcAft>
             </a:pPr>
             <a:r>
-              <a:rPr sz="1200" b="0">
+              <a:rPr sz="4400" b="0">
                 <a:solidFill>
-                  <a:srgbClr val="C5D0D6"/>
+                  <a:srgbClr val="F4F0E8"/>
                 </a:solidFill>
-                <a:latin typeface="Calibri"/>
+                <a:latin typeface="Georgia"/>
               </a:rPr>
-              <a:t>DeckSmith</a:t>
-            </a:r>
-          </a:p>
-        </p:txBody>
-      </p:sp>
-      <p:sp>
-        <p:nvSpPr>
-          <p:cNvPr id="5" name="TextBox 4"/>
-          <p:cNvSpPr txBox="1"/>
-          <p:nvPr/>
-        </p:nvSpPr>
-        <p:spPr>
-          <a:xfrm>
-            <a:off x="566928" y="2057400"/>
-            <a:ext cx="6367271" cy="2011680"/>
-          </a:xfrm>
-          <a:prstGeom prst="rect">
-            <a:avLst/>
-          </a:prstGeom>
-          <a:noFill/>
-        </p:spPr>
-        <p:txBody>
-          <a:bodyPr wrap="square" lIns="0" rIns="0" tIns="0" bIns="0" anchor="t"/>
-          <a:lstStyle/>
+              <a:t>Customer retention</a:t>
+            </a:r>
+          </a:p>
           <a:p>
             <a:pPr algn="l">
               <a:lnSpc>
@@ -4791,9 +5055,30 @@
                 </a:solidFill>
                 <a:latin typeface="Georgia"/>
               </a:rPr>
-              <a:t>Customer retention</a:t>
-            </a:r>
-          </a:p>
+              <a:t>review</a:t>
+            </a:r>
+          </a:p>
+        </p:txBody>
+      </p:sp>
+      <p:sp>
+        <p:nvSpPr>
+          <p:cNvPr id="11" name="TextBox 10"/>
+          <p:cNvSpPr txBox="1"/>
+          <p:nvPr/>
+        </p:nvSpPr>
+        <p:spPr>
+          <a:xfrm>
+            <a:off x="566928" y="4023360"/>
+            <a:ext cx="6077712" cy="731520"/>
+          </a:xfrm>
+          <a:prstGeom prst="rect">
+            <a:avLst/>
+          </a:prstGeom>
+          <a:noFill/>
+        </p:spPr>
+        <p:txBody>
+          <a:bodyPr wrap="square" lIns="0" rIns="0" tIns="0" bIns="0" anchor="t"/>
+          <a:lstStyle/>
           <a:p>
             <a:pPr algn="l">
               <a:lnSpc>
@@ -4807,27 +5092,27 @@
               </a:spcAft>
             </a:pPr>
             <a:r>
-              <a:rPr sz="4400" b="0">
+              <a:rPr sz="1800" b="0">
                 <a:solidFill>
-                  <a:srgbClr val="F4F0E8"/>
+                  <a:srgbClr val="C5D0D6"/>
                 </a:solidFill>
-                <a:latin typeface="Georgia"/>
+                <a:latin typeface="Calibri"/>
               </a:rPr>
-              <a:t>review</a:t>
-            </a:r>
-          </a:p>
-        </p:txBody>
-      </p:sp>
-      <p:sp>
-        <p:nvSpPr>
-          <p:cNvPr id="6" name="TextBox 5"/>
+              <a:t>Prepared for the exec audience</a:t>
+            </a:r>
+          </a:p>
+        </p:txBody>
+      </p:sp>
+      <p:sp>
+        <p:nvSpPr>
+          <p:cNvPr id="12" name="TextBox 11"/>
           <p:cNvSpPr txBox="1"/>
           <p:nvPr/>
         </p:nvSpPr>
         <p:spPr>
           <a:xfrm>
-            <a:off x="566928" y="4160520"/>
-            <a:ext cx="6367271" cy="731520"/>
+            <a:off x="566928" y="6464808"/>
+            <a:ext cx="1828800" cy="274320"/>
           </a:xfrm>
           <a:prstGeom prst="rect">
             <a:avLst/>
@@ -4850,70 +5135,27 @@
               </a:spcAft>
             </a:pPr>
             <a:r>
-              <a:rPr sz="1800" b="0">
+              <a:rPr sz="1200" b="0">
                 <a:solidFill>
                   <a:srgbClr val="C5D0D6"/>
                 </a:solidFill>
                 <a:latin typeface="Calibri"/>
               </a:rPr>
-              <a:t>Prepared for the exec audience</a:t>
-            </a:r>
-          </a:p>
-        </p:txBody>
-      </p:sp>
-      <p:sp>
-        <p:nvSpPr>
-          <p:cNvPr id="7" name="Oval 6"/>
-          <p:cNvSpPr/>
-          <p:nvPr/>
-        </p:nvSpPr>
-        <p:spPr>
-          <a:xfrm>
-            <a:off x="8808719" y="2606040"/>
-            <a:ext cx="1645920" cy="1645920"/>
-          </a:xfrm>
-          <a:prstGeom prst="ellipse">
-            <a:avLst/>
-          </a:prstGeom>
-          <a:noFill/>
-          <a:ln w="15875">
-            <a:solidFill>
-              <a:srgbClr val="9C4221"/>
-            </a:solidFill>
-          </a:ln>
-        </p:spPr>
-        <p:style>
-          <a:lnRef idx="1">
-            <a:schemeClr val="accent1"/>
-          </a:lnRef>
-          <a:fillRef idx="3">
-            <a:schemeClr val="accent1"/>
-          </a:fillRef>
-          <a:effectRef idx="2">
-            <a:schemeClr val="accent1"/>
-          </a:effectRef>
-          <a:fontRef idx="minor">
-            <a:schemeClr val="lt1"/>
-          </a:fontRef>
-        </p:style>
-        <p:txBody>
-          <a:bodyPr rtlCol="0" anchor="ctr"/>
-          <a:lstStyle/>
-          <a:p>
-            <a:pPr algn="ctr"/>
-          </a:p>
-        </p:txBody>
-      </p:sp>
-      <p:sp>
-        <p:nvSpPr>
-          <p:cNvPr id="8" name="TextBox 7"/>
+              <a:t>DeckSmith</a:t>
+            </a:r>
+          </a:p>
+        </p:txBody>
+      </p:sp>
+      <p:sp>
+        <p:nvSpPr>
+          <p:cNvPr id="13" name="TextBox 12"/>
           <p:cNvSpPr txBox="1"/>
           <p:nvPr/>
         </p:nvSpPr>
         <p:spPr>
           <a:xfrm>
-            <a:off x="5864351" y="6483096"/>
-            <a:ext cx="640080" cy="292608"/>
+            <a:off x="5620512" y="6464808"/>
+            <a:ext cx="548640" cy="292608"/>
           </a:xfrm>
           <a:prstGeom prst="rect">
             <a:avLst/>
@@ -5067,8 +5309,8 @@
         </p:nvSpPr>
         <p:spPr>
           <a:xfrm>
-            <a:off x="566928" y="1463040"/>
-            <a:ext cx="3740912" cy="2057400"/>
+            <a:off x="566928" y="1417320"/>
+            <a:ext cx="3740912" cy="2377440"/>
           </a:xfrm>
           <a:prstGeom prst="roundRect">
             <a:avLst>
@@ -5112,7 +5354,7 @@
         </p:nvSpPr>
         <p:spPr>
           <a:xfrm>
-            <a:off x="566928" y="1463040"/>
+            <a:off x="566928" y="1417320"/>
             <a:ext cx="3740912" cy="36576"/>
           </a:xfrm>
           <a:prstGeom prst="rect">
@@ -5155,8 +5397,8 @@
         </p:nvSpPr>
         <p:spPr>
           <a:xfrm>
-            <a:off x="704088" y="1691640"/>
-            <a:ext cx="3512312" cy="822960"/>
+            <a:off x="704088" y="1554480"/>
+            <a:ext cx="3466592" cy="731520"/>
           </a:xfrm>
           <a:prstGeom prst="rect">
             <a:avLst/>
@@ -5179,7 +5421,7 @@
               </a:spcAft>
             </a:pPr>
             <a:r>
-              <a:rPr sz="4000" b="1">
+              <a:rPr sz="3600" b="1">
                 <a:solidFill>
                   <a:srgbClr val="1C1915"/>
                 </a:solidFill>
@@ -5198,8 +5440,8 @@
         </p:nvSpPr>
         <p:spPr>
           <a:xfrm>
-            <a:off x="704088" y="2560320"/>
-            <a:ext cx="3512312" cy="640080"/>
+            <a:off x="704088" y="2286000"/>
+            <a:ext cx="3466592" cy="457200"/>
           </a:xfrm>
           <a:prstGeom prst="rect">
             <a:avLst/>
@@ -5235,14 +5477,186 @@
       </p:sp>
       <p:sp>
         <p:nvSpPr>
-          <p:cNvPr id="8" name="Rounded Rectangle 7"/>
+          <p:cNvPr id="8" name="Rectangle 7"/>
           <p:cNvSpPr/>
           <p:nvPr/>
         </p:nvSpPr>
         <p:spPr>
           <a:xfrm>
-            <a:off x="4307840" y="1463040"/>
-            <a:ext cx="3740912" cy="2057400"/>
+            <a:off x="704088" y="3154680"/>
+            <a:ext cx="1001460" cy="320040"/>
+          </a:xfrm>
+          <a:prstGeom prst="rect">
+            <a:avLst/>
+          </a:prstGeom>
+          <a:solidFill>
+            <a:srgbClr val="9C4221"/>
+          </a:solidFill>
+          <a:ln>
+            <a:noFill/>
+          </a:ln>
+        </p:spPr>
+        <p:style>
+          <a:lnRef idx="1">
+            <a:schemeClr val="accent1"/>
+          </a:lnRef>
+          <a:fillRef idx="3">
+            <a:schemeClr val="accent1"/>
+          </a:fillRef>
+          <a:effectRef idx="2">
+            <a:schemeClr val="accent1"/>
+          </a:effectRef>
+          <a:fontRef idx="minor">
+            <a:schemeClr val="lt1"/>
+          </a:fontRef>
+        </p:style>
+        <p:txBody>
+          <a:bodyPr rtlCol="0" anchor="ctr"/>
+          <a:lstStyle/>
+          <a:p>
+            <a:pPr algn="ctr"/>
+          </a:p>
+        </p:txBody>
+      </p:sp>
+      <p:sp>
+        <p:nvSpPr>
+          <p:cNvPr id="9" name="Rectangle 8"/>
+          <p:cNvSpPr/>
+          <p:nvPr/>
+        </p:nvSpPr>
+        <p:spPr>
+          <a:xfrm>
+            <a:off x="1936654" y="3208778"/>
+            <a:ext cx="1001460" cy="265942"/>
+          </a:xfrm>
+          <a:prstGeom prst="rect">
+            <a:avLst/>
+          </a:prstGeom>
+          <a:solidFill>
+            <a:srgbClr val="9C4221"/>
+          </a:solidFill>
+          <a:ln>
+            <a:noFill/>
+          </a:ln>
+        </p:spPr>
+        <p:style>
+          <a:lnRef idx="1">
+            <a:schemeClr val="accent1"/>
+          </a:lnRef>
+          <a:fillRef idx="3">
+            <a:schemeClr val="accent1"/>
+          </a:fillRef>
+          <a:effectRef idx="2">
+            <a:schemeClr val="accent1"/>
+          </a:effectRef>
+          <a:fontRef idx="minor">
+            <a:schemeClr val="lt1"/>
+          </a:fontRef>
+        </p:style>
+        <p:txBody>
+          <a:bodyPr rtlCol="0" anchor="ctr"/>
+          <a:lstStyle/>
+          <a:p>
+            <a:pPr algn="ctr"/>
+          </a:p>
+        </p:txBody>
+      </p:sp>
+      <p:sp>
+        <p:nvSpPr>
+          <p:cNvPr id="10" name="Rectangle 9"/>
+          <p:cNvSpPr/>
+          <p:nvPr/>
+        </p:nvSpPr>
+        <p:spPr>
+          <a:xfrm>
+            <a:off x="3169220" y="3385109"/>
+            <a:ext cx="1001460" cy="89611"/>
+          </a:xfrm>
+          <a:prstGeom prst="rect">
+            <a:avLst/>
+          </a:prstGeom>
+          <a:solidFill>
+            <a:srgbClr val="9C4221"/>
+          </a:solidFill>
+          <a:ln>
+            <a:noFill/>
+          </a:ln>
+        </p:spPr>
+        <p:style>
+          <a:lnRef idx="1">
+            <a:schemeClr val="accent1"/>
+          </a:lnRef>
+          <a:fillRef idx="3">
+            <a:schemeClr val="accent1"/>
+          </a:fillRef>
+          <a:effectRef idx="2">
+            <a:schemeClr val="accent1"/>
+          </a:effectRef>
+          <a:fontRef idx="minor">
+            <a:schemeClr val="lt1"/>
+          </a:fontRef>
+        </p:style>
+        <p:txBody>
+          <a:bodyPr rtlCol="0" anchor="ctr"/>
+          <a:lstStyle/>
+          <a:p>
+            <a:pPr algn="ctr"/>
+          </a:p>
+        </p:txBody>
+      </p:sp>
+      <p:sp>
+        <p:nvSpPr>
+          <p:cNvPr id="11" name="TextBox 10"/>
+          <p:cNvSpPr txBox="1"/>
+          <p:nvPr/>
+        </p:nvSpPr>
+        <p:spPr>
+          <a:xfrm>
+            <a:off x="704088" y="2788920"/>
+            <a:ext cx="3466592" cy="320040"/>
+          </a:xfrm>
+          <a:prstGeom prst="rect">
+            <a:avLst/>
+          </a:prstGeom>
+          <a:noFill/>
+        </p:spPr>
+        <p:txBody>
+          <a:bodyPr wrap="square" lIns="0" rIns="0" tIns="0" bIns="0" anchor="t"/>
+          <a:lstStyle/>
+          <a:p>
+            <a:pPr algn="l">
+              <a:lnSpc>
+                <a:spcPct val="100000"/>
+              </a:lnSpc>
+              <a:spcBef>
+                <a:spcPts val="0"/>
+              </a:spcBef>
+              <a:spcAft>
+                <a:spcPts val="0"/>
+              </a:spcAft>
+            </a:pPr>
+            <a:r>
+              <a:rPr sz="1200" b="1">
+                <a:solidFill>
+                  <a:srgbClr val="9C4221"/>
+                </a:solidFill>
+                <a:latin typeface="Calibri"/>
+              </a:rPr>
+              <a:t>Ended lower</a:t>
+            </a:r>
+          </a:p>
+        </p:txBody>
+      </p:sp>
+      <p:sp>
+        <p:nvSpPr>
+          <p:cNvPr id="12" name="Rounded Rectangle 11"/>
+          <p:cNvSpPr/>
+          <p:nvPr/>
+        </p:nvSpPr>
+        <p:spPr>
+          <a:xfrm>
+            <a:off x="4307840" y="1417320"/>
+            <a:ext cx="3740912" cy="2377440"/>
           </a:xfrm>
           <a:prstGeom prst="roundRect">
             <a:avLst>
@@ -5280,13 +5694,13 @@
       </p:sp>
       <p:sp>
         <p:nvSpPr>
-          <p:cNvPr id="9" name="Rectangle 8"/>
+          <p:cNvPr id="13" name="Rectangle 12"/>
           <p:cNvSpPr/>
           <p:nvPr/>
         </p:nvSpPr>
         <p:spPr>
           <a:xfrm>
-            <a:off x="4307840" y="1463040"/>
+            <a:off x="4307840" y="1417320"/>
             <a:ext cx="3740912" cy="36576"/>
           </a:xfrm>
           <a:prstGeom prst="rect">
@@ -5323,14 +5737,14 @@
       </p:sp>
       <p:sp>
         <p:nvSpPr>
-          <p:cNvPr id="10" name="TextBox 9"/>
+          <p:cNvPr id="14" name="TextBox 13"/>
           <p:cNvSpPr txBox="1"/>
           <p:nvPr/>
         </p:nvSpPr>
         <p:spPr>
           <a:xfrm>
-            <a:off x="4445000" y="1691640"/>
-            <a:ext cx="3512312" cy="822960"/>
+            <a:off x="4445000" y="1554480"/>
+            <a:ext cx="3466592" cy="731520"/>
           </a:xfrm>
           <a:prstGeom prst="rect">
             <a:avLst/>
@@ -5353,7 +5767,7 @@
               </a:spcAft>
             </a:pPr>
             <a:r>
-              <a:rPr sz="4000" b="1">
+              <a:rPr sz="3600" b="1">
                 <a:solidFill>
                   <a:srgbClr val="1C1915"/>
                 </a:solidFill>
@@ -5366,14 +5780,14 @@
       </p:sp>
       <p:sp>
         <p:nvSpPr>
-          <p:cNvPr id="11" name="TextBox 10"/>
+          <p:cNvPr id="15" name="TextBox 14"/>
           <p:cNvSpPr txBox="1"/>
           <p:nvPr/>
         </p:nvSpPr>
         <p:spPr>
           <a:xfrm>
-            <a:off x="4445000" y="2560320"/>
-            <a:ext cx="3512312" cy="640080"/>
+            <a:off x="4445000" y="2286000"/>
+            <a:ext cx="3466592" cy="457200"/>
           </a:xfrm>
           <a:prstGeom prst="rect">
             <a:avLst/>
@@ -5409,14 +5823,14 @@
       </p:sp>
       <p:sp>
         <p:nvSpPr>
-          <p:cNvPr id="12" name="Rounded Rectangle 11"/>
+          <p:cNvPr id="16" name="Rounded Rectangle 15"/>
           <p:cNvSpPr/>
           <p:nvPr/>
         </p:nvSpPr>
         <p:spPr>
           <a:xfrm>
-            <a:off x="8048752" y="1463040"/>
-            <a:ext cx="3576320" cy="2057400"/>
+            <a:off x="8048752" y="1417320"/>
+            <a:ext cx="3576320" cy="2377440"/>
           </a:xfrm>
           <a:prstGeom prst="roundRect">
             <a:avLst>
@@ -5454,13 +5868,13 @@
       </p:sp>
       <p:sp>
         <p:nvSpPr>
-          <p:cNvPr id="13" name="Rectangle 12"/>
+          <p:cNvPr id="17" name="Rectangle 16"/>
           <p:cNvSpPr/>
           <p:nvPr/>
         </p:nvSpPr>
         <p:spPr>
           <a:xfrm>
-            <a:off x="8048752" y="1463040"/>
+            <a:off x="8048752" y="1417320"/>
             <a:ext cx="3576320" cy="36576"/>
           </a:xfrm>
           <a:prstGeom prst="rect">
@@ -5497,14 +5911,14 @@
       </p:sp>
       <p:sp>
         <p:nvSpPr>
-          <p:cNvPr id="14" name="TextBox 13"/>
+          <p:cNvPr id="18" name="TextBox 17"/>
           <p:cNvSpPr txBox="1"/>
           <p:nvPr/>
         </p:nvSpPr>
         <p:spPr>
           <a:xfrm>
-            <a:off x="8185912" y="1691640"/>
-            <a:ext cx="3347720" cy="822960"/>
+            <a:off x="8185912" y="1554480"/>
+            <a:ext cx="3302000" cy="731520"/>
           </a:xfrm>
           <a:prstGeom prst="rect">
             <a:avLst/>
@@ -5527,7 +5941,7 @@
               </a:spcAft>
             </a:pPr>
             <a:r>
-              <a:rPr sz="4000" b="1">
+              <a:rPr sz="3600" b="1">
                 <a:solidFill>
                   <a:srgbClr val="1C1915"/>
                 </a:solidFill>
@@ -5540,14 +5954,14 @@
       </p:sp>
       <p:sp>
         <p:nvSpPr>
-          <p:cNvPr id="15" name="TextBox 14"/>
+          <p:cNvPr id="19" name="TextBox 18"/>
           <p:cNvSpPr txBox="1"/>
           <p:nvPr/>
         </p:nvSpPr>
         <p:spPr>
           <a:xfrm>
-            <a:off x="8185912" y="2560320"/>
-            <a:ext cx="3347720" cy="640080"/>
+            <a:off x="8185912" y="2286000"/>
+            <a:ext cx="3302000" cy="457200"/>
           </a:xfrm>
           <a:prstGeom prst="rect">
             <a:avLst/>
@@ -5583,13 +5997,13 @@
       </p:sp>
       <p:sp>
         <p:nvSpPr>
-          <p:cNvPr id="16" name="Rounded Rectangle 15"/>
+          <p:cNvPr id="20" name="Rounded Rectangle 19"/>
           <p:cNvSpPr/>
           <p:nvPr/>
         </p:nvSpPr>
         <p:spPr>
           <a:xfrm>
-            <a:off x="566928" y="3794760"/>
+            <a:off x="566928" y="3931920"/>
             <a:ext cx="11058144" cy="1188720"/>
           </a:xfrm>
           <a:prstGeom prst="roundRect">
@@ -5628,13 +6042,13 @@
       </p:sp>
       <p:sp>
         <p:nvSpPr>
-          <p:cNvPr id="17" name="Rectangle 16"/>
+          <p:cNvPr id="21" name="Rectangle 20"/>
           <p:cNvSpPr/>
           <p:nvPr/>
         </p:nvSpPr>
         <p:spPr>
           <a:xfrm>
-            <a:off x="566928" y="3794760"/>
+            <a:off x="566928" y="3931920"/>
             <a:ext cx="54864" cy="1188720"/>
           </a:xfrm>
           <a:prstGeom prst="rect">
@@ -5671,13 +6085,13 @@
       </p:sp>
       <p:sp>
         <p:nvSpPr>
-          <p:cNvPr id="18" name="TextBox 17"/>
+          <p:cNvPr id="22" name="TextBox 21"/>
           <p:cNvSpPr txBox="1"/>
           <p:nvPr/>
         </p:nvSpPr>
         <p:spPr>
           <a:xfrm>
-            <a:off x="841248" y="3886200"/>
+            <a:off x="841248" y="4023360"/>
             <a:ext cx="10646664" cy="1005840"/>
           </a:xfrm>
           <a:prstGeom prst="rect">
@@ -5714,7 +6128,7 @@
       </p:sp>
       <p:sp>
         <p:nvSpPr>
-          <p:cNvPr id="19" name="Rectangle 18"/>
+          <p:cNvPr id="23" name="Rectangle 22"/>
           <p:cNvSpPr/>
           <p:nvPr/>
         </p:nvSpPr>
@@ -5757,7 +6171,7 @@
       </p:sp>
       <p:sp>
         <p:nvSpPr>
-          <p:cNvPr id="20" name="TextBox 19"/>
+          <p:cNvPr id="24" name="TextBox 23"/>
           <p:cNvSpPr txBox="1"/>
           <p:nvPr/>
         </p:nvSpPr>
@@ -5800,7 +6214,7 @@
       </p:sp>
       <p:sp>
         <p:nvSpPr>
-          <p:cNvPr id="21" name="TextBox 20"/>
+          <p:cNvPr id="25" name="TextBox 24"/>
           <p:cNvSpPr txBox="1"/>
           <p:nvPr/>
         </p:nvSpPr>

--- a/docs/examples/sample-deck.pptx
+++ b/docs/examples/sample-deck.pptx
@@ -244,7 +244,11 @@
             </c:dLbl>
             <c:dLbl>
               <c:idx val="2"/>
-              <c:spPr/>
+              <c:spPr>
+                <a:solidFill>
+                  <a:srgbClr val="FBF9F5"/>
+                </a:solidFill>
+              </c:spPr>
               <c:txPr>
                 <a:bodyPr/>
                 <a:lstStyle/>
@@ -252,7 +256,7 @@
                   <a:pPr>
                     <a:defRPr sz="1200" b="1">
                       <a:solidFill>
-                        <a:srgbClr val="9C4221"/>
+                        <a:srgbClr val="1C1915"/>
                       </a:solidFill>
                       <a:latin typeface="Calibri"/>
                     </a:defRPr>
@@ -1172,22 +1176,22 @@
           <a:lstStyle/>
           <a:p>
             <a:r>
-              <a:t>f1 · Monthly churn (weighted) · churn_rate_quarter · main.cs.churn_monthly · statement duckdb-2d0b066a031a · queried 2026-10-18 07:41 UTC</a:t>
-            </a:r>
-          </a:p>
-          <a:p>
-            <a:r>
-              <a:t>f2 · Monthly NRR (weighted) · nrr_quarter · main.cs.revenue_monthly · statement duckdb-155de445a62c · queried 2026-10-18 07:41 UTC</a:t>
-            </a:r>
-          </a:p>
-          <a:p>
-            <a:r>
-              <a:t>f3 · Active subscriptions · active_subscriptions · main.cs.churn_monthly · statement duckdb-a81513bbd28d · queried 2026-10-18 07:41 UTC</a:t>
-            </a:r>
-          </a:p>
-          <a:p>
-            <a:r>
-              <a:t>f4 · Monthly churn · churn_trend_monthly · main.cs.churn_monthly · statement duckdb-8a32313abbf5 · queried 2026-10-18 07:41 UTC</a:t>
+              <a:t>f1 · Monthly churn (weighted) · churn_rate_quarter · main.cs.churn_monthly · statement duckdb-272542a974cf · queried 2026-10-18 08:06 UTC</a:t>
+            </a:r>
+          </a:p>
+          <a:p>
+            <a:r>
+              <a:t>f2 · Monthly NRR (weighted) · nrr_quarter · main.cs.revenue_monthly · statement duckdb-9113d58fbba8 · queried 2026-10-18 08:06 UTC</a:t>
+            </a:r>
+          </a:p>
+          <a:p>
+            <a:r>
+              <a:t>f3 · Active subscriptions · active_subscriptions · main.cs.churn_monthly · statement duckdb-3a066ef1e495 · queried 2026-10-18 08:06 UTC</a:t>
+            </a:r>
+          </a:p>
+          <a:p>
+            <a:r>
+              <a:t>f4 · Monthly churn · churn_trend_monthly · main.cs.churn_monthly · statement duckdb-7369bb8798d3 · queried 2026-10-18 08:06 UTC</a:t>
             </a:r>
           </a:p>
           <a:p>
@@ -1337,7 +1341,7 @@
           <a:lstStyle/>
           <a:p>
             <a:r>
-              <a:t>f4 · Monthly churn · churn_trend_monthly · main.cs.churn_monthly · statement duckdb-8a32313abbf5 · queried 2026-10-18 07:41 UTC</a:t>
+              <a:t>f4 · Monthly churn · churn_trend_monthly · main.cs.churn_monthly · statement duckdb-7369bb8798d3 · queried 2026-10-18 08:06 UTC</a:t>
             </a:r>
           </a:p>
           <a:p>
@@ -1427,7 +1431,7 @@
           <a:lstStyle/>
           <a:p>
             <a:r>
-              <a:t>f5 · Weighted monthly churn by segment · churn_by_segment · main.cs.churn_monthly · statement duckdb-2a5b138f207b · queried 2026-10-18 07:41 UTC</a:t>
+              <a:t>f5 · Weighted monthly churn by segment · churn_by_segment · main.cs.churn_monthly · statement duckdb-b9bf5643c92a · queried 2026-10-18 08:06 UTC</a:t>
             </a:r>
           </a:p>
           <a:p>
@@ -1517,27 +1521,27 @@
           <a:lstStyle/>
           <a:p>
             <a:r>
-              <a:t>f1 · Monthly churn (weighted) · churn_rate_quarter · main.cs.churn_monthly · statement duckdb-2d0b066a031a · queried 2026-10-18 07:41 UTC</a:t>
-            </a:r>
-          </a:p>
-          <a:p>
-            <a:r>
-              <a:t>f2 · Monthly NRR (weighted) · nrr_quarter · main.cs.revenue_monthly · statement duckdb-155de445a62c · queried 2026-10-18 07:41 UTC</a:t>
-            </a:r>
-          </a:p>
-          <a:p>
-            <a:r>
-              <a:t>f3 · Active subscriptions · active_subscriptions · main.cs.churn_monthly · statement duckdb-a81513bbd28d · queried 2026-10-18 07:41 UTC</a:t>
-            </a:r>
-          </a:p>
-          <a:p>
-            <a:r>
-              <a:t>f4 · Monthly churn · churn_trend_monthly · main.cs.churn_monthly · statement duckdb-8a32313abbf5 · queried 2026-10-18 07:41 UTC</a:t>
-            </a:r>
-          </a:p>
-          <a:p>
-            <a:r>
-              <a:t>f5 · Weighted monthly churn by segment · churn_by_segment · main.cs.churn_monthly · statement duckdb-2a5b138f207b · queried 2026-10-18 07:41 UTC</a:t>
+              <a:t>f1 · Monthly churn (weighted) · churn_rate_quarter · main.cs.churn_monthly · statement duckdb-272542a974cf · queried 2026-10-18 08:06 UTC</a:t>
+            </a:r>
+          </a:p>
+          <a:p>
+            <a:r>
+              <a:t>f2 · Monthly NRR (weighted) · nrr_quarter · main.cs.revenue_monthly · statement duckdb-9113d58fbba8 · queried 2026-10-18 08:06 UTC</a:t>
+            </a:r>
+          </a:p>
+          <a:p>
+            <a:r>
+              <a:t>f3 · Active subscriptions · active_subscriptions · main.cs.churn_monthly · statement duckdb-3a066ef1e495 · queried 2026-10-18 08:06 UTC</a:t>
+            </a:r>
+          </a:p>
+          <a:p>
+            <a:r>
+              <a:t>f4 · Monthly churn · churn_trend_monthly · main.cs.churn_monthly · statement duckdb-7369bb8798d3 · queried 2026-10-18 08:06 UTC</a:t>
+            </a:r>
+          </a:p>
+          <a:p>
+            <a:r>
+              <a:t>f5 · Weighted monthly churn by segment · churn_by_segment · main.cs.churn_monthly · statement duckdb-b9bf5643c92a · queried 2026-10-18 08:06 UTC</a:t>
             </a:r>
           </a:p>
           <a:p>
